--- a/Teaching/Compile Time Errrors/problem_session_5_const_correctness.pptx
+++ b/Teaching/Compile Time Errrors/problem_session_5_const_correctness.pptx
@@ -4,6 +4,9 @@
   <p:sldMasterIdLst>
     <p:sldMasterId id="2147483648" r:id="rId1"/>
   </p:sldMasterIdLst>
+  <p:notesMasterIdLst>
+    <p:notesMasterId r:id="rId9"/>
+  </p:notesMasterIdLst>
   <p:sldIdLst>
     <p:sldId id="256" r:id="rId2"/>
     <p:sldId id="257" r:id="rId3"/>
@@ -13,10 +16,7 @@
     <p:sldId id="261" r:id="rId7"/>
     <p:sldId id="262" r:id="rId8"/>
   </p:sldIdLst>
-  <p:notesMasterIdLst>
-    <p:notesMasterId r:id="rId9"/>
-  </p:notesMasterIdLst>
-  <p:sldSz cx="9144000" cy="5143500"/>
+  <p:sldSz cx="9144000" cy="5143500" type="screen16x9"/>
   <p:notesSz cx="5143500" cy="9144000"/>
   <p:defaultTextStyle>
     <a:lvl1pPr marL="0" algn="l" defTabSz="914400" rtl="0" eaLnBrk="1" latinLnBrk="0" hangingPunct="1">
@@ -110,6 +110,11 @@
       </a:defRPr>
     </a:lvl9pPr>
   </p:defaultTextStyle>
+  <p:extLst>
+    <p:ext uri="{EFAFB233-063F-42B5-8137-9DF3F51BA10A}">
+      <p15:sldGuideLst xmlns:p15="http://schemas.microsoft.com/office/powerpoint/2012/main"/>
+    </p:ext>
+  </p:extLst>
 </p:presentation>
 </file>
 
@@ -135,234 +140,10 @@
           <a:chExt cx="0" cy="0"/>
         </a:xfrm>
       </p:grpSpPr>
-      <p:sp>
-        <p:nvSpPr>
-          <p:cNvPr id="2" name="Header Placeholder 1"/>
-          <p:cNvSpPr>
-            <a:spLocks noGrp="1"/>
-          </p:cNvSpPr>
-          <p:nvPr>
-            <p:ph type="hdr" sz="quarter"/>
-          </p:nvPr>
-        </p:nvSpPr>
-        <p:spPr>
-          <a:xfrm>
-            <a:off x="0" y="0"/>
-            <a:ext cx="2971800" cy="458788"/>
-          </a:xfrm>
-          <a:prstGeom prst="rect">
-            <a:avLst/>
-          </a:prstGeom>
-        </p:spPr>
-        <p:txBody>
-          <a:bodyPr vert="horz" lIns="91440" tIns="45720" rIns="91440" bIns="45720" rtlCol="0"/>
-          <a:lstStyle>
-            <a:lvl1pPr algn="l">
-              <a:defRPr sz="1200"/>
-            </a:lvl1pPr>
-          </a:lstStyle>
-          <a:p>
-            <a:endParaRPr lang="en-US"/>
-          </a:p>
-        </p:txBody>
-      </p:sp>
-      <p:sp>
-        <p:nvSpPr>
-          <p:cNvPr id="3" name="Date Placeholder 2"/>
-          <p:cNvSpPr>
-            <a:spLocks noGrp="1"/>
-          </p:cNvSpPr>
-          <p:nvPr>
-            <p:ph type="dt" idx="1"/>
-          </p:nvPr>
-        </p:nvSpPr>
-        <p:spPr>
-          <a:xfrm>
-            <a:off x="3884613" y="0"/>
-            <a:ext cx="2971800" cy="458788"/>
-          </a:xfrm>
-          <a:prstGeom prst="rect">
-            <a:avLst/>
-          </a:prstGeom>
-        </p:spPr>
-        <p:txBody>
-          <a:bodyPr vert="horz" lIns="91440" tIns="45720" rIns="91440" bIns="45720" rtlCol="0"/>
-          <a:lstStyle>
-            <a:lvl1pPr algn="r">
-              <a:defRPr sz="1200"/>
-            </a:lvl1pPr>
-          </a:lstStyle>
-          <a:p>
-            <a:fld id="{5282F153-3F37-0F45-9E97-73ACFA13230C}" type="datetimeFigureOut">
-              <a:rPr lang="en-US"/>
-              <a:t>7/23/19</a:t>
-            </a:fld>
-            <a:endParaRPr lang="en-US"/>
-          </a:p>
-        </p:txBody>
-      </p:sp>
-      <p:sp>
-        <p:nvSpPr>
-          <p:cNvPr id="4" name="Slide Image Placeholder 3"/>
-          <p:cNvSpPr>
-            <a:spLocks noGrp="1" noRot="1" noChangeAspect="1"/>
-          </p:cNvSpPr>
-          <p:nvPr>
-            <p:ph type="sldImg" idx="2"/>
-          </p:nvPr>
-        </p:nvSpPr>
-        <p:spPr>
-          <a:xfrm>
-            <a:off x="685800" y="1143000"/>
-            <a:ext cx="5486400" cy="3086100"/>
-          </a:xfrm>
-          <a:prstGeom prst="rect">
-            <a:avLst/>
-          </a:prstGeom>
-          <a:noFill/>
-          <a:ln w="12700">
-            <a:solidFill>
-              <a:prstClr val="black"/>
-            </a:solidFill>
-          </a:ln>
-        </p:spPr>
-        <p:txBody>
-          <a:bodyPr vert="horz" lIns="91440" tIns="45720" rIns="91440" bIns="45720" rtlCol="0" anchor="ctr"/>
-          <a:lstStyle/>
-          <a:p>
-            <a:endParaRPr lang="en-US"/>
-          </a:p>
-        </p:txBody>
-      </p:sp>
-      <p:sp>
-        <p:nvSpPr>
-          <p:cNvPr id="5" name="Notes Placeholder 4"/>
-          <p:cNvSpPr>
-            <a:spLocks noGrp="1"/>
-          </p:cNvSpPr>
-          <p:nvPr>
-            <p:ph type="body" sz="quarter" idx="3"/>
-          </p:nvPr>
-        </p:nvSpPr>
-        <p:spPr>
-          <a:xfrm>
-            <a:off x="685800" y="4400550"/>
-            <a:ext cx="5486400" cy="3600450"/>
-          </a:xfrm>
-          <a:prstGeom prst="rect">
-            <a:avLst/>
-          </a:prstGeom>
-        </p:spPr>
-        <p:txBody>
-          <a:bodyPr vert="horz" lIns="91440" tIns="45720" rIns="91440" bIns="45720" rtlCol="0"/>
-          <a:lstStyle/>
-          <a:p>
-            <a:pPr lvl="0"/>
-            <a:r>
-              <a:rPr lang="en-US"/>
-              <a:t>Click to edit Master text styles</a:t>
-            </a:r>
-          </a:p>
-          <a:p>
-            <a:pPr lvl="1"/>
-            <a:r>
-              <a:rPr lang="en-US"/>
-              <a:t>Second level</a:t>
-            </a:r>
-          </a:p>
-          <a:p>
-            <a:pPr lvl="2"/>
-            <a:r>
-              <a:rPr lang="en-US"/>
-              <a:t>Third level</a:t>
-            </a:r>
-          </a:p>
-          <a:p>
-            <a:pPr lvl="3"/>
-            <a:r>
-              <a:rPr lang="en-US"/>
-              <a:t>Fourth level</a:t>
-            </a:r>
-          </a:p>
-          <a:p>
-            <a:pPr lvl="4"/>
-            <a:r>
-              <a:rPr lang="en-US"/>
-              <a:t>Fifth level</a:t>
-            </a:r>
-          </a:p>
-        </p:txBody>
-      </p:sp>
-      <p:sp>
-        <p:nvSpPr>
-          <p:cNvPr id="6" name="Footer Placeholder 5"/>
-          <p:cNvSpPr>
-            <a:spLocks noGrp="1"/>
-          </p:cNvSpPr>
-          <p:nvPr>
-            <p:ph type="ftr" sz="quarter" idx="4"/>
-          </p:nvPr>
-        </p:nvSpPr>
-        <p:spPr>
-          <a:xfrm>
-            <a:off x="0" y="8685213"/>
-            <a:ext cx="2971800" cy="458787"/>
-          </a:xfrm>
-          <a:prstGeom prst="rect">
-            <a:avLst/>
-          </a:prstGeom>
-        </p:spPr>
-        <p:txBody>
-          <a:bodyPr vert="horz" lIns="91440" tIns="45720" rIns="91440" bIns="45720" rtlCol="0" anchor="b"/>
-          <a:lstStyle>
-            <a:lvl1pPr algn="l">
-              <a:defRPr sz="1200"/>
-            </a:lvl1pPr>
-          </a:lstStyle>
-          <a:p>
-            <a:endParaRPr lang="en-US"/>
-          </a:p>
-        </p:txBody>
-      </p:sp>
-      <p:sp>
-        <p:nvSpPr>
-          <p:cNvPr id="7" name="Slide Number Placeholder 6"/>
-          <p:cNvSpPr>
-            <a:spLocks noGrp="1"/>
-          </p:cNvSpPr>
-          <p:nvPr>
-            <p:ph type="sldNum" sz="quarter" idx="5"/>
-          </p:nvPr>
-        </p:nvSpPr>
-        <p:spPr>
-          <a:xfrm>
-            <a:off x="3884613" y="8685213"/>
-            <a:ext cx="2971800" cy="458787"/>
-          </a:xfrm>
-          <a:prstGeom prst="rect">
-            <a:avLst/>
-          </a:prstGeom>
-        </p:spPr>
-        <p:txBody>
-          <a:bodyPr vert="horz" lIns="91440" tIns="45720" rIns="91440" bIns="45720" rtlCol="0" anchor="b"/>
-          <a:lstStyle>
-            <a:lvl1pPr algn="r">
-              <a:defRPr sz="1200"/>
-            </a:lvl1pPr>
-          </a:lstStyle>
-          <a:p>
-            <a:fld id="{CE5E9CC1-C706-0F49-92D6-E571CC5EEA8F}" type="slidenum">
-              <a:rPr lang="en-US"/>
-              <a:t>‹#›</a:t>
-            </a:fld>
-            <a:endParaRPr lang="en-US"/>
-          </a:p>
-        </p:txBody>
-      </p:sp>
     </p:spTree>
     <p:extLst>
       <p:ext uri="{BB962C8B-B14F-4D97-AF65-F5344CB8AC3E}">
-        <p14:creationId xmlns:p14="http://schemas.microsoft.com/office/powerpoint/2010/main" val="1024086991"/>
+        <p14:creationId xmlns:p14="http://schemas.microsoft.com/office/powerpoint/2010/main" val="3567480634"/>
       </p:ext>
     </p:extLst>
   </p:cSld>
@@ -506,10 +287,6 @@
           <a:bodyPr/>
           <a:lstStyle/>
           <a:p>
-            <a:r>
-              <a:rPr lang="en-US" dirty="0"/>
-              <a:t/>
-            </a:r>
             <a:endParaRPr lang="en-US" dirty="0"/>
           </a:p>
         </p:txBody>
@@ -594,10 +371,6 @@
           <a:bodyPr/>
           <a:lstStyle/>
           <a:p>
-            <a:r>
-              <a:rPr lang="en-US" dirty="0"/>
-              <a:t/>
-            </a:r>
             <a:endParaRPr lang="en-US" dirty="0"/>
           </a:p>
         </p:txBody>
@@ -682,10 +455,6 @@
           <a:bodyPr/>
           <a:lstStyle/>
           <a:p>
-            <a:r>
-              <a:rPr lang="en-US" dirty="0"/>
-              <a:t/>
-            </a:r>
             <a:endParaRPr lang="en-US" dirty="0"/>
           </a:p>
         </p:txBody>
@@ -770,10 +539,6 @@
           <a:bodyPr/>
           <a:lstStyle/>
           <a:p>
-            <a:r>
-              <a:rPr lang="en-US" dirty="0"/>
-              <a:t/>
-            </a:r>
             <a:endParaRPr lang="en-US" dirty="0"/>
           </a:p>
         </p:txBody>
@@ -858,10 +623,6 @@
           <a:bodyPr/>
           <a:lstStyle/>
           <a:p>
-            <a:r>
-              <a:rPr lang="en-US" dirty="0"/>
-              <a:t/>
-            </a:r>
             <a:endParaRPr lang="en-US" dirty="0"/>
           </a:p>
         </p:txBody>
@@ -946,10 +707,6 @@
           <a:bodyPr/>
           <a:lstStyle/>
           <a:p>
-            <a:r>
-              <a:rPr lang="en-US" dirty="0"/>
-              <a:t/>
-            </a:r>
             <a:endParaRPr lang="en-US" dirty="0"/>
           </a:p>
         </p:txBody>
@@ -1034,10 +791,6 @@
           <a:bodyPr/>
           <a:lstStyle/>
           <a:p>
-            <a:r>
-              <a:rPr lang="en-US" dirty="0"/>
-              <a:t/>
-            </a:r>
             <a:endParaRPr lang="en-US" dirty="0"/>
           </a:p>
         </p:txBody>
@@ -1111,6 +864,11 @@
 <file path=ppt/slideMasters/slideMaster1.xml><?xml version="1.0" encoding="utf-8"?>
 <p:sldMaster xmlns:a="http://schemas.openxmlformats.org/drawingml/2006/main" xmlns:r="http://schemas.openxmlformats.org/officeDocument/2006/relationships" xmlns:p="http://schemas.openxmlformats.org/presentationml/2006/main">
   <p:cSld>
+    <p:bg>
+      <p:bgRef idx="1001">
+        <a:schemeClr val="bg1"/>
+      </p:bgRef>
+    </p:bg>
     <p:spTree>
       <p:nvGrpSpPr>
         <p:cNvPr id="1" name=""/>
@@ -1393,6 +1151,7 @@
         <a:solidFill>
           <a:srgbClr val="0D1117"/>
         </a:solidFill>
+        <a:effectLst/>
       </p:bgPr>
     </p:bg>
     <p:spTree>
@@ -1430,7 +1189,7 @@
           <a:bodyPr wrap="square" rtlCol="0" anchor="ctr"/>
           <a:lstStyle/>
           <a:p>
-            <a:pPr algn="ctr" indent="0" marL="0">
+            <a:pPr marL="0" indent="0" algn="ctr">
               <a:buNone/>
             </a:pPr>
             <a:r>
@@ -1466,7 +1225,7 @@
           <a:bodyPr wrap="square" rtlCol="0" anchor="ctr"/>
           <a:lstStyle/>
           <a:p>
-            <a:pPr algn="ctr" indent="0" marL="0">
+            <a:pPr marL="0" indent="0" algn="ctr">
               <a:buNone/>
             </a:pPr>
             <a:r>
@@ -1502,7 +1261,7 @@
           <a:bodyPr wrap="square" rtlCol="0" anchor="ctr"/>
           <a:lstStyle/>
           <a:p>
-            <a:pPr algn="ctr" indent="0" marL="0">
+            <a:pPr marL="0" indent="0" algn="ctr">
               <a:buNone/>
             </a:pPr>
             <a:r>
@@ -1536,6 +1295,13 @@
           </a:solidFill>
           <a:ln/>
         </p:spPr>
+        <p:txBody>
+          <a:bodyPr/>
+          <a:lstStyle/>
+          <a:p>
+            <a:endParaRPr/>
+          </a:p>
+        </p:txBody>
       </p:sp>
     </p:spTree>
   </p:cSld>
@@ -1553,6 +1319,7 @@
         <a:solidFill>
           <a:srgbClr val="0D1117"/>
         </a:solidFill>
+        <a:effectLst/>
       </p:bgPr>
     </p:bg>
     <p:spTree>
@@ -1590,7 +1357,7 @@
           <a:bodyPr wrap="square" rtlCol="0" anchor="ctr"/>
           <a:lstStyle/>
           <a:p>
-            <a:pPr indent="0" marL="0">
+            <a:pPr marL="0" indent="0">
               <a:buNone/>
             </a:pPr>
             <a:r>
@@ -1629,7 +1396,7 @@
           <a:bodyPr wrap="square" rtlCol="0" anchor="ctr"/>
           <a:lstStyle/>
           <a:p>
-            <a:pPr indent="0" marL="0">
+            <a:pPr marL="0" indent="0">
               <a:buNone/>
             </a:pPr>
             <a:r>
@@ -1655,7 +1422,7 @@
         </p:nvSpPr>
         <p:spPr>
           <a:xfrm>
-            <a:off x="365760" y="1005840"/>
+            <a:off x="365760" y="1087119"/>
             <a:ext cx="4754880" cy="2194560"/>
           </a:xfrm>
           <a:prstGeom prst="rect">
@@ -1671,6 +1438,13 @@
             <a:prstDash val="solid"/>
           </a:ln>
         </p:spPr>
+        <p:txBody>
+          <a:bodyPr/>
+          <a:lstStyle/>
+          <a:p>
+            <a:endParaRPr/>
+          </a:p>
+        </p:txBody>
       </p:sp>
       <p:sp>
         <p:nvSpPr>
@@ -1680,7 +1454,7 @@
         </p:nvSpPr>
         <p:spPr>
           <a:xfrm>
-            <a:off x="365760" y="1005840"/>
+            <a:off x="365760" y="1087119"/>
             <a:ext cx="36576" cy="2194560"/>
           </a:xfrm>
           <a:prstGeom prst="rect">
@@ -1691,6 +1465,13 @@
           </a:solidFill>
           <a:ln/>
         </p:spPr>
+        <p:txBody>
+          <a:bodyPr/>
+          <a:lstStyle/>
+          <a:p>
+            <a:endParaRPr/>
+          </a:p>
+        </p:txBody>
       </p:sp>
       <p:sp>
         <p:nvSpPr>
@@ -1700,7 +1481,7 @@
         </p:nvSpPr>
         <p:spPr>
           <a:xfrm>
-            <a:off x="502920" y="1097280"/>
+            <a:off x="502920" y="1178559"/>
             <a:ext cx="4526280" cy="2011680"/>
           </a:xfrm>
           <a:prstGeom prst="rect">
@@ -1713,7 +1494,7 @@
           <a:bodyPr wrap="square" rtlCol="0" anchor="t"/>
           <a:lstStyle/>
           <a:p>
-            <a:pPr indent="0" marL="0">
+            <a:pPr marL="0" indent="0">
               <a:buNone/>
             </a:pPr>
             <a:r>
@@ -1730,7 +1511,7 @@
             <a:endParaRPr lang="en-US" sz="900" dirty="0"/>
           </a:p>
           <a:p>
-            <a:pPr indent="0" marL="0">
+            <a:pPr marL="0" indent="0">
               <a:buNone/>
             </a:pPr>
             <a:r>
@@ -1747,7 +1528,7 @@
             <a:endParaRPr lang="en-US" sz="900" dirty="0"/>
           </a:p>
           <a:p>
-            <a:pPr indent="0" marL="0">
+            <a:pPr marL="0" indent="0">
               <a:buNone/>
             </a:pPr>
             <a:r>
@@ -1764,7 +1545,7 @@
             <a:endParaRPr lang="en-US" sz="900" dirty="0"/>
           </a:p>
           <a:p>
-            <a:pPr indent="0" marL="0">
+            <a:pPr marL="0" indent="0">
               <a:buNone/>
             </a:pPr>
             <a:r>
@@ -1781,7 +1562,7 @@
             <a:endParaRPr lang="en-US" sz="900" dirty="0"/>
           </a:p>
           <a:p>
-            <a:pPr indent="0" marL="0">
+            <a:pPr marL="0" indent="0">
               <a:buNone/>
             </a:pPr>
             <a:r>
@@ -1798,7 +1579,7 @@
             <a:endParaRPr lang="en-US" sz="900" dirty="0"/>
           </a:p>
           <a:p>
-            <a:pPr indent="0" marL="0">
+            <a:pPr marL="0" indent="0">
               <a:buNone/>
             </a:pPr>
             <a:r>
@@ -1815,7 +1596,7 @@
             <a:endParaRPr lang="en-US" sz="900" dirty="0"/>
           </a:p>
           <a:p>
-            <a:pPr indent="0" marL="0">
+            <a:pPr marL="0" indent="0">
               <a:buNone/>
             </a:pPr>
             <a:r>
@@ -1832,7 +1613,7 @@
             <a:endParaRPr lang="en-US" sz="900" dirty="0"/>
           </a:p>
           <a:p>
-            <a:pPr indent="0" marL="0">
+            <a:pPr marL="0" indent="0">
               <a:buNone/>
             </a:pPr>
             <a:r>
@@ -1849,7 +1630,7 @@
             <a:endParaRPr lang="en-US" sz="900" dirty="0"/>
           </a:p>
           <a:p>
-            <a:pPr indent="0" marL="0">
+            <a:pPr marL="0" indent="0">
               <a:buNone/>
             </a:pPr>
             <a:r>
@@ -1866,7 +1647,7 @@
             <a:endParaRPr lang="en-US" sz="900" dirty="0"/>
           </a:p>
           <a:p>
-            <a:pPr indent="0" marL="0">
+            <a:pPr marL="0" indent="0">
               <a:buNone/>
             </a:pPr>
             <a:r>
@@ -1883,7 +1664,7 @@
             <a:endParaRPr lang="en-US" sz="900" dirty="0"/>
           </a:p>
           <a:p>
-            <a:pPr indent="0" marL="0">
+            <a:pPr marL="0" indent="0">
               <a:buNone/>
             </a:pPr>
             <a:r>
@@ -1909,7 +1690,7 @@
         </p:nvSpPr>
         <p:spPr>
           <a:xfrm>
-            <a:off x="5303520" y="1005840"/>
+            <a:off x="5303520" y="1087119"/>
             <a:ext cx="3474720" cy="1645920"/>
           </a:xfrm>
           <a:prstGeom prst="rect">
@@ -1925,6 +1706,13 @@
             <a:prstDash val="solid"/>
           </a:ln>
         </p:spPr>
+        <p:txBody>
+          <a:bodyPr/>
+          <a:lstStyle/>
+          <a:p>
+            <a:endParaRPr/>
+          </a:p>
+        </p:txBody>
       </p:sp>
       <p:sp>
         <p:nvSpPr>
@@ -1934,7 +1722,7 @@
         </p:nvSpPr>
         <p:spPr>
           <a:xfrm>
-            <a:off x="5440680" y="1097280"/>
+            <a:off x="5440680" y="1178559"/>
             <a:ext cx="3200400" cy="228600"/>
           </a:xfrm>
           <a:prstGeom prst="rect">
@@ -1947,7 +1735,7 @@
           <a:bodyPr wrap="square" rtlCol="0" anchor="ctr"/>
           <a:lstStyle/>
           <a:p>
-            <a:pPr indent="0" marL="0">
+            <a:pPr marL="0" indent="0">
               <a:buNone/>
             </a:pPr>
             <a:r>
@@ -1970,7 +1758,7 @@
         </p:nvSpPr>
         <p:spPr>
           <a:xfrm>
-            <a:off x="5440680" y="1371600"/>
+            <a:off x="5440680" y="1452879"/>
             <a:ext cx="3200400" cy="1188720"/>
           </a:xfrm>
           <a:prstGeom prst="rect">
@@ -1983,7 +1771,7 @@
           <a:bodyPr wrap="square" rtlCol="0" anchor="t"/>
           <a:lstStyle/>
           <a:p>
-            <a:pPr indent="0" marL="0">
+            <a:pPr marL="0" indent="0">
               <a:buNone/>
             </a:pPr>
             <a:r>
@@ -1997,7 +1785,7 @@
             <a:endParaRPr lang="en-US" sz="1000" dirty="0"/>
           </a:p>
           <a:p>
-            <a:pPr indent="0" marL="0">
+            <a:pPr marL="0" indent="0">
               <a:buNone/>
             </a:pPr>
             <a:r>
@@ -2011,7 +1799,7 @@
             <a:endParaRPr lang="en-US" sz="1000" dirty="0"/>
           </a:p>
           <a:p>
-            <a:pPr indent="0" marL="0">
+            <a:pPr marL="0" indent="0">
               <a:buNone/>
             </a:pPr>
             <a:r>
@@ -2025,13 +1813,13 @@
             <a:endParaRPr lang="en-US" sz="1000" dirty="0"/>
           </a:p>
           <a:p>
-            <a:pPr indent="0" marL="0">
+            <a:pPr marL="0" indent="0">
               <a:buNone/>
             </a:pPr>
             <a:endParaRPr lang="en-US" sz="1000" dirty="0"/>
           </a:p>
           <a:p>
-            <a:pPr indent="0" marL="0">
+            <a:pPr marL="0" indent="0">
               <a:buNone/>
             </a:pPr>
             <a:r>
@@ -2045,7 +1833,7 @@
             <a:endParaRPr lang="en-US" sz="1000" dirty="0"/>
           </a:p>
           <a:p>
-            <a:pPr indent="0" marL="0">
+            <a:pPr marL="0" indent="0">
               <a:buNone/>
             </a:pPr>
             <a:r>
@@ -2068,7 +1856,7 @@
         </p:nvSpPr>
         <p:spPr>
           <a:xfrm>
-            <a:off x="365760" y="3337560"/>
+            <a:off x="365760" y="3418839"/>
             <a:ext cx="8412480" cy="502920"/>
           </a:xfrm>
           <a:prstGeom prst="rect">
@@ -2079,6 +1867,13 @@
           </a:solidFill>
           <a:ln/>
         </p:spPr>
+        <p:txBody>
+          <a:bodyPr/>
+          <a:lstStyle/>
+          <a:p>
+            <a:endParaRPr/>
+          </a:p>
+        </p:txBody>
       </p:sp>
       <p:sp>
         <p:nvSpPr>
@@ -2088,7 +1883,7 @@
         </p:nvSpPr>
         <p:spPr>
           <a:xfrm>
-            <a:off x="502920" y="3410712"/>
+            <a:off x="502920" y="3491991"/>
             <a:ext cx="8138160" cy="365760"/>
           </a:xfrm>
           <a:prstGeom prst="rect">
@@ -2101,7 +1896,7 @@
           <a:bodyPr wrap="square" rtlCol="0" anchor="ctr"/>
           <a:lstStyle/>
           <a:p>
-            <a:pPr indent="0" marL="0">
+            <a:pPr marL="0" indent="0">
               <a:buNone/>
             </a:pPr>
             <a:r>
@@ -2115,7 +1910,7 @@
             <a:endParaRPr lang="en-US" sz="1000" dirty="0"/>
           </a:p>
           <a:p>
-            <a:pPr indent="0" marL="0">
+            <a:pPr marL="0" indent="0">
               <a:buNone/>
             </a:pPr>
             <a:r>
@@ -2146,6 +1941,7 @@
         <a:solidFill>
           <a:srgbClr val="0D1117"/>
         </a:solidFill>
+        <a:effectLst/>
       </p:bgPr>
     </p:bg>
     <p:spTree>
@@ -2183,7 +1979,7 @@
           <a:bodyPr wrap="square" rtlCol="0" anchor="ctr"/>
           <a:lstStyle/>
           <a:p>
-            <a:pPr indent="0" marL="0">
+            <a:pPr marL="0" indent="0">
               <a:buNone/>
             </a:pPr>
             <a:r>
@@ -2222,7 +2018,7 @@
           <a:bodyPr wrap="square" rtlCol="0" anchor="ctr"/>
           <a:lstStyle/>
           <a:p>
-            <a:pPr indent="0" marL="0">
+            <a:pPr marL="0" indent="0">
               <a:buNone/>
             </a:pPr>
             <a:r>
@@ -2261,6 +2057,13 @@
             <a:prstDash val="solid"/>
           </a:ln>
         </p:spPr>
+        <p:txBody>
+          <a:bodyPr/>
+          <a:lstStyle/>
+          <a:p>
+            <a:endParaRPr/>
+          </a:p>
+        </p:txBody>
       </p:sp>
       <p:sp>
         <p:nvSpPr>
@@ -2281,6 +2084,13 @@
           </a:solidFill>
           <a:ln/>
         </p:spPr>
+        <p:txBody>
+          <a:bodyPr/>
+          <a:lstStyle/>
+          <a:p>
+            <a:endParaRPr/>
+          </a:p>
+        </p:txBody>
       </p:sp>
       <p:sp>
         <p:nvSpPr>
@@ -2303,7 +2113,7 @@
           <a:bodyPr wrap="square" rtlCol="0" anchor="t"/>
           <a:lstStyle/>
           <a:p>
-            <a:pPr indent="0" marL="0">
+            <a:pPr marL="0" indent="0">
               <a:buNone/>
             </a:pPr>
             <a:r>
@@ -2320,7 +2130,7 @@
             <a:endParaRPr lang="en-US" sz="900" dirty="0"/>
           </a:p>
           <a:p>
-            <a:pPr indent="0" marL="0">
+            <a:pPr marL="0" indent="0">
               <a:buNone/>
             </a:pPr>
             <a:r>
@@ -2337,7 +2147,7 @@
             <a:endParaRPr lang="en-US" sz="900" dirty="0"/>
           </a:p>
           <a:p>
-            <a:pPr indent="0" marL="0">
+            <a:pPr marL="0" indent="0">
               <a:buNone/>
             </a:pPr>
             <a:r>
@@ -2354,7 +2164,7 @@
             <a:endParaRPr lang="en-US" sz="900" dirty="0"/>
           </a:p>
           <a:p>
-            <a:pPr indent="0" marL="0">
+            <a:pPr marL="0" indent="0">
               <a:buNone/>
             </a:pPr>
             <a:r>
@@ -2371,7 +2181,7 @@
             <a:endParaRPr lang="en-US" sz="900" dirty="0"/>
           </a:p>
           <a:p>
-            <a:pPr indent="0" marL="0">
+            <a:pPr marL="0" indent="0">
               <a:buNone/>
             </a:pPr>
             <a:r>
@@ -2388,7 +2198,7 @@
             <a:endParaRPr lang="en-US" sz="900" dirty="0"/>
           </a:p>
           <a:p>
-            <a:pPr indent="0" marL="0">
+            <a:pPr marL="0" indent="0">
               <a:buNone/>
             </a:pPr>
             <a:r>
@@ -2425,6 +2235,13 @@
           </a:solidFill>
           <a:ln/>
         </p:spPr>
+        <p:txBody>
+          <a:bodyPr/>
+          <a:lstStyle/>
+          <a:p>
+            <a:endParaRPr/>
+          </a:p>
+        </p:txBody>
       </p:sp>
       <p:sp>
         <p:nvSpPr>
@@ -2447,7 +2264,7 @@
           <a:bodyPr wrap="square" rtlCol="0" anchor="ctr"/>
           <a:lstStyle/>
           <a:p>
-            <a:pPr indent="0" marL="0">
+            <a:pPr marL="0" indent="0">
               <a:buNone/>
             </a:pPr>
             <a:r>
@@ -2464,7 +2281,7 @@
             <a:endParaRPr lang="en-US" sz="900" dirty="0"/>
           </a:p>
           <a:p>
-            <a:pPr indent="0" marL="0">
+            <a:pPr marL="0" indent="0">
               <a:buNone/>
             </a:pPr>
             <a:r>
@@ -2481,7 +2298,7 @@
             <a:endParaRPr lang="en-US" sz="900" dirty="0"/>
           </a:p>
           <a:p>
-            <a:pPr indent="0" marL="0">
+            <a:pPr marL="0" indent="0">
               <a:buNone/>
             </a:pPr>
             <a:r>
@@ -2520,7 +2337,7 @@
           <a:bodyPr wrap="square" rtlCol="0" anchor="ctr"/>
           <a:lstStyle/>
           <a:p>
-            <a:pPr indent="0" marL="0">
+            <a:pPr marL="0" indent="0">
               <a:buNone/>
             </a:pPr>
             <a:r>
@@ -2554,6 +2371,13 @@
           </a:solidFill>
           <a:ln/>
         </p:spPr>
+        <p:txBody>
+          <a:bodyPr/>
+          <a:lstStyle/>
+          <a:p>
+            <a:endParaRPr/>
+          </a:p>
+        </p:txBody>
       </p:sp>
       <p:sp>
         <p:nvSpPr>
@@ -2576,7 +2400,7 @@
           <a:bodyPr wrap="square" rtlCol="0" anchor="ctr"/>
           <a:lstStyle/>
           <a:p>
-            <a:pPr indent="0" marL="0">
+            <a:pPr marL="0" indent="0">
               <a:buNone/>
             </a:pPr>
             <a:r>
@@ -2615,7 +2439,7 @@
           <a:bodyPr wrap="square" rtlCol="0" anchor="ctr"/>
           <a:lstStyle/>
           <a:p>
-            <a:pPr indent="0" marL="0">
+            <a:pPr marL="0" indent="0">
               <a:buNone/>
             </a:pPr>
             <a:r>
@@ -2649,6 +2473,13 @@
           </a:solidFill>
           <a:ln/>
         </p:spPr>
+        <p:txBody>
+          <a:bodyPr/>
+          <a:lstStyle/>
+          <a:p>
+            <a:endParaRPr/>
+          </a:p>
+        </p:txBody>
       </p:sp>
       <p:sp>
         <p:nvSpPr>
@@ -2671,7 +2502,7 @@
           <a:bodyPr wrap="square" rtlCol="0" anchor="ctr"/>
           <a:lstStyle/>
           <a:p>
-            <a:pPr indent="0" marL="0">
+            <a:pPr marL="0" indent="0">
               <a:buNone/>
             </a:pPr>
             <a:r>
@@ -2710,7 +2541,7 @@
           <a:bodyPr wrap="square" rtlCol="0" anchor="ctr"/>
           <a:lstStyle/>
           <a:p>
-            <a:pPr indent="0" marL="0">
+            <a:pPr marL="0" indent="0">
               <a:buNone/>
             </a:pPr>
             <a:r>
@@ -2744,6 +2575,13 @@
           </a:solidFill>
           <a:ln/>
         </p:spPr>
+        <p:txBody>
+          <a:bodyPr/>
+          <a:lstStyle/>
+          <a:p>
+            <a:endParaRPr/>
+          </a:p>
+        </p:txBody>
       </p:sp>
       <p:sp>
         <p:nvSpPr>
@@ -2766,7 +2604,7 @@
           <a:bodyPr wrap="square" rtlCol="0" anchor="ctr"/>
           <a:lstStyle/>
           <a:p>
-            <a:pPr indent="0" marL="0">
+            <a:pPr marL="0" indent="0">
               <a:buNone/>
             </a:pPr>
             <a:r>
@@ -2805,7 +2643,7 @@
           <a:bodyPr wrap="square" rtlCol="0" anchor="ctr"/>
           <a:lstStyle/>
           <a:p>
-            <a:pPr indent="0" marL="0">
+            <a:pPr marL="0" indent="0">
               <a:buNone/>
             </a:pPr>
             <a:r>
@@ -2839,6 +2677,13 @@
           </a:solidFill>
           <a:ln/>
         </p:spPr>
+        <p:txBody>
+          <a:bodyPr/>
+          <a:lstStyle/>
+          <a:p>
+            <a:endParaRPr/>
+          </a:p>
+        </p:txBody>
       </p:sp>
       <p:sp>
         <p:nvSpPr>
@@ -2859,6 +2704,13 @@
           </a:solidFill>
           <a:ln/>
         </p:spPr>
+        <p:txBody>
+          <a:bodyPr/>
+          <a:lstStyle/>
+          <a:p>
+            <a:endParaRPr/>
+          </a:p>
+        </p:txBody>
       </p:sp>
       <p:sp>
         <p:nvSpPr>
@@ -2881,7 +2733,7 @@
           <a:bodyPr wrap="square" rtlCol="0" anchor="ctr"/>
           <a:lstStyle/>
           <a:p>
-            <a:pPr indent="0" marL="0">
+            <a:pPr marL="0" indent="0">
               <a:buNone/>
             </a:pPr>
             <a:r>
@@ -2917,7 +2769,7 @@
           <a:bodyPr wrap="square" rtlCol="0" anchor="ctr"/>
           <a:lstStyle/>
           <a:p>
-            <a:pPr indent="0" marL="0">
+            <a:pPr marL="0" indent="0">
               <a:buNone/>
             </a:pPr>
             <a:r>
@@ -2931,13 +2783,13 @@
             <a:endParaRPr lang="en-US" sz="1100" dirty="0"/>
           </a:p>
           <a:p>
-            <a:pPr indent="0" marL="0">
+            <a:pPr marL="0" indent="0">
               <a:buNone/>
             </a:pPr>
             <a:endParaRPr lang="en-US" sz="1100" dirty="0"/>
           </a:p>
           <a:p>
-            <a:pPr indent="0" marL="0">
+            <a:pPr marL="0" indent="0">
               <a:buNone/>
             </a:pPr>
             <a:r>
@@ -2951,7 +2803,7 @@
             <a:endParaRPr lang="en-US" sz="1100" dirty="0"/>
           </a:p>
           <a:p>
-            <a:pPr indent="0" marL="0">
+            <a:pPr marL="0" indent="0">
               <a:buNone/>
             </a:pPr>
             <a:r>
@@ -2982,6 +2834,7 @@
         <a:solidFill>
           <a:srgbClr val="0D1117"/>
         </a:solidFill>
+        <a:effectLst/>
       </p:bgPr>
     </p:bg>
     <p:spTree>
@@ -3019,7 +2872,7 @@
           <a:bodyPr wrap="square" rtlCol="0" anchor="ctr"/>
           <a:lstStyle/>
           <a:p>
-            <a:pPr indent="0" marL="0">
+            <a:pPr marL="0" indent="0">
               <a:buNone/>
             </a:pPr>
             <a:r>
@@ -3058,7 +2911,7 @@
           <a:bodyPr wrap="square" rtlCol="0" anchor="ctr"/>
           <a:lstStyle/>
           <a:p>
-            <a:pPr indent="0" marL="0">
+            <a:pPr marL="0" indent="0">
               <a:buNone/>
             </a:pPr>
             <a:r>
@@ -3097,6 +2950,13 @@
             <a:prstDash val="solid"/>
           </a:ln>
         </p:spPr>
+        <p:txBody>
+          <a:bodyPr/>
+          <a:lstStyle/>
+          <a:p>
+            <a:endParaRPr/>
+          </a:p>
+        </p:txBody>
       </p:sp>
       <p:sp>
         <p:nvSpPr>
@@ -3117,6 +2977,13 @@
           </a:solidFill>
           <a:ln/>
         </p:spPr>
+        <p:txBody>
+          <a:bodyPr/>
+          <a:lstStyle/>
+          <a:p>
+            <a:endParaRPr/>
+          </a:p>
+        </p:txBody>
       </p:sp>
       <p:sp>
         <p:nvSpPr>
@@ -3139,7 +3006,7 @@
           <a:bodyPr wrap="square" rtlCol="0" anchor="t"/>
           <a:lstStyle/>
           <a:p>
-            <a:pPr indent="0" marL="0">
+            <a:pPr marL="0" indent="0">
               <a:buNone/>
             </a:pPr>
             <a:r>
@@ -3156,7 +3023,7 @@
             <a:endParaRPr lang="en-US" sz="900" dirty="0"/>
           </a:p>
           <a:p>
-            <a:pPr indent="0" marL="0">
+            <a:pPr marL="0" indent="0">
               <a:buNone/>
             </a:pPr>
             <a:r>
@@ -3173,7 +3040,7 @@
             <a:endParaRPr lang="en-US" sz="900" dirty="0"/>
           </a:p>
           <a:p>
-            <a:pPr indent="0" marL="0">
+            <a:pPr marL="0" indent="0">
               <a:buNone/>
             </a:pPr>
             <a:r>
@@ -3190,7 +3057,7 @@
             <a:endParaRPr lang="en-US" sz="900" dirty="0"/>
           </a:p>
           <a:p>
-            <a:pPr indent="0" marL="0">
+            <a:pPr marL="0" indent="0">
               <a:buNone/>
             </a:pPr>
             <a:r>
@@ -3207,7 +3074,7 @@
             <a:endParaRPr lang="en-US" sz="900" dirty="0"/>
           </a:p>
           <a:p>
-            <a:pPr indent="0" marL="0">
+            <a:pPr marL="0" indent="0">
               <a:buNone/>
             </a:pPr>
             <a:r>
@@ -3224,7 +3091,7 @@
             <a:endParaRPr lang="en-US" sz="900" dirty="0"/>
           </a:p>
           <a:p>
-            <a:pPr indent="0" marL="0">
+            <a:pPr marL="0" indent="0">
               <a:buNone/>
             </a:pPr>
             <a:r>
@@ -3241,7 +3108,7 @@
             <a:endParaRPr lang="en-US" sz="900" dirty="0"/>
           </a:p>
           <a:p>
-            <a:pPr indent="0" marL="0">
+            <a:pPr marL="0" indent="0">
               <a:buNone/>
             </a:pPr>
             <a:r>
@@ -3258,7 +3125,7 @@
             <a:endParaRPr lang="en-US" sz="900" dirty="0"/>
           </a:p>
           <a:p>
-            <a:pPr indent="0" marL="0">
+            <a:pPr marL="0" indent="0">
               <a:buNone/>
             </a:pPr>
             <a:r>
@@ -3275,7 +3142,7 @@
             <a:endParaRPr lang="en-US" sz="900" dirty="0"/>
           </a:p>
           <a:p>
-            <a:pPr indent="0" marL="0">
+            <a:pPr marL="0" indent="0">
               <a:buNone/>
             </a:pPr>
             <a:r>
@@ -3292,7 +3159,7 @@
             <a:endParaRPr lang="en-US" sz="900" dirty="0"/>
           </a:p>
           <a:p>
-            <a:pPr indent="0" marL="0">
+            <a:pPr marL="0" indent="0">
               <a:buNone/>
             </a:pPr>
             <a:r>
@@ -3309,7 +3176,7 @@
             <a:endParaRPr lang="en-US" sz="900" dirty="0"/>
           </a:p>
           <a:p>
-            <a:pPr indent="0" marL="0">
+            <a:pPr marL="0" indent="0">
               <a:buNone/>
             </a:pPr>
             <a:r>
@@ -3326,7 +3193,7 @@
             <a:endParaRPr lang="en-US" sz="900" dirty="0"/>
           </a:p>
           <a:p>
-            <a:pPr indent="0" marL="0">
+            <a:pPr marL="0" indent="0">
               <a:buNone/>
             </a:pPr>
             <a:r>
@@ -3343,7 +3210,7 @@
             <a:endParaRPr lang="en-US" sz="900" dirty="0"/>
           </a:p>
           <a:p>
-            <a:pPr indent="0" marL="0">
+            <a:pPr marL="0" indent="0">
               <a:buNone/>
             </a:pPr>
             <a:r>
@@ -3382,7 +3249,7 @@
           <a:bodyPr wrap="square" rtlCol="0" anchor="ctr"/>
           <a:lstStyle/>
           <a:p>
-            <a:pPr indent="0" marL="0">
+            <a:pPr marL="0" indent="0">
               <a:buNone/>
             </a:pPr>
             <a:r>
@@ -3421,6 +3288,13 @@
             <a:prstDash val="solid"/>
           </a:ln>
         </p:spPr>
+        <p:txBody>
+          <a:bodyPr/>
+          <a:lstStyle/>
+          <a:p>
+            <a:endParaRPr/>
+          </a:p>
+        </p:txBody>
       </p:sp>
       <p:sp>
         <p:nvSpPr>
@@ -3441,6 +3315,13 @@
           </a:solidFill>
           <a:ln/>
         </p:spPr>
+        <p:txBody>
+          <a:bodyPr/>
+          <a:lstStyle/>
+          <a:p>
+            <a:endParaRPr/>
+          </a:p>
+        </p:txBody>
       </p:sp>
       <p:sp>
         <p:nvSpPr>
@@ -3463,7 +3344,7 @@
           <a:bodyPr wrap="square" rtlCol="0" anchor="t"/>
           <a:lstStyle/>
           <a:p>
-            <a:pPr indent="0" marL="0">
+            <a:pPr marL="0" indent="0">
               <a:buNone/>
             </a:pPr>
             <a:r>
@@ -3480,7 +3361,7 @@
             <a:endParaRPr lang="en-US" sz="900" dirty="0"/>
           </a:p>
           <a:p>
-            <a:pPr indent="0" marL="0">
+            <a:pPr marL="0" indent="0">
               <a:buNone/>
             </a:pPr>
             <a:r>
@@ -3497,7 +3378,7 @@
             <a:endParaRPr lang="en-US" sz="900" dirty="0"/>
           </a:p>
           <a:p>
-            <a:pPr indent="0" marL="0">
+            <a:pPr marL="0" indent="0">
               <a:buNone/>
             </a:pPr>
             <a:r>
@@ -3514,7 +3395,7 @@
             <a:endParaRPr lang="en-US" sz="900" dirty="0"/>
           </a:p>
           <a:p>
-            <a:pPr indent="0" marL="0">
+            <a:pPr marL="0" indent="0">
               <a:buNone/>
             </a:pPr>
             <a:r>
@@ -3531,7 +3412,7 @@
             <a:endParaRPr lang="en-US" sz="900" dirty="0"/>
           </a:p>
           <a:p>
-            <a:pPr indent="0" marL="0">
+            <a:pPr marL="0" indent="0">
               <a:buNone/>
             </a:pPr>
             <a:r>
@@ -3548,7 +3429,7 @@
             <a:endParaRPr lang="en-US" sz="900" dirty="0"/>
           </a:p>
           <a:p>
-            <a:pPr indent="0" marL="0">
+            <a:pPr marL="0" indent="0">
               <a:buNone/>
             </a:pPr>
             <a:r>
@@ -3565,7 +3446,7 @@
             <a:endParaRPr lang="en-US" sz="900" dirty="0"/>
           </a:p>
           <a:p>
-            <a:pPr indent="0" marL="0">
+            <a:pPr marL="0" indent="0">
               <a:buNone/>
             </a:pPr>
             <a:r>
@@ -3582,7 +3463,7 @@
             <a:endParaRPr lang="en-US" sz="900" dirty="0"/>
           </a:p>
           <a:p>
-            <a:pPr indent="0" marL="0">
+            <a:pPr marL="0" indent="0">
               <a:buNone/>
             </a:pPr>
             <a:r>
@@ -3619,6 +3500,13 @@
           </a:solidFill>
           <a:ln/>
         </p:spPr>
+        <p:txBody>
+          <a:bodyPr/>
+          <a:lstStyle/>
+          <a:p>
+            <a:endParaRPr/>
+          </a:p>
+        </p:txBody>
       </p:sp>
       <p:sp>
         <p:nvSpPr>
@@ -3641,7 +3529,7 @@
           <a:bodyPr wrap="square" rtlCol="0" anchor="ctr"/>
           <a:lstStyle/>
           <a:p>
-            <a:pPr indent="0" marL="0">
+            <a:pPr marL="0" indent="0">
               <a:buNone/>
             </a:pPr>
             <a:r>
@@ -3677,7 +3565,7 @@
           <a:bodyPr wrap="square" rtlCol="0" anchor="ctr"/>
           <a:lstStyle/>
           <a:p>
-            <a:pPr indent="0" marL="0">
+            <a:pPr marL="0" indent="0">
               <a:buNone/>
             </a:pPr>
             <a:r>
@@ -3691,7 +3579,7 @@
             <a:endParaRPr lang="en-US" sz="900" dirty="0"/>
           </a:p>
           <a:p>
-            <a:pPr indent="0" marL="0">
+            <a:pPr marL="0" indent="0">
               <a:buNone/>
             </a:pPr>
             <a:r>
@@ -3705,7 +3593,7 @@
             <a:endParaRPr lang="en-US" sz="900" dirty="0"/>
           </a:p>
           <a:p>
-            <a:pPr indent="0" marL="0">
+            <a:pPr marL="0" indent="0">
               <a:buNone/>
             </a:pPr>
             <a:r>
@@ -3736,6 +3624,7 @@
         <a:solidFill>
           <a:srgbClr val="0D1117"/>
         </a:solidFill>
+        <a:effectLst/>
       </p:bgPr>
     </p:bg>
     <p:spTree>
@@ -3773,7 +3662,7 @@
           <a:bodyPr wrap="square" rtlCol="0" anchor="ctr"/>
           <a:lstStyle/>
           <a:p>
-            <a:pPr indent="0" marL="0">
+            <a:pPr marL="0" indent="0">
               <a:buNone/>
             </a:pPr>
             <a:r>
@@ -3812,7 +3701,7 @@
           <a:bodyPr wrap="square" rtlCol="0" anchor="ctr"/>
           <a:lstStyle/>
           <a:p>
-            <a:pPr indent="0" marL="0">
+            <a:pPr marL="0" indent="0">
               <a:buNone/>
             </a:pPr>
             <a:r>
@@ -3851,6 +3740,13 @@
             <a:prstDash val="solid"/>
           </a:ln>
         </p:spPr>
+        <p:txBody>
+          <a:bodyPr/>
+          <a:lstStyle/>
+          <a:p>
+            <a:endParaRPr/>
+          </a:p>
+        </p:txBody>
       </p:sp>
       <p:sp>
         <p:nvSpPr>
@@ -3871,6 +3767,13 @@
           </a:solidFill>
           <a:ln/>
         </p:spPr>
+        <p:txBody>
+          <a:bodyPr/>
+          <a:lstStyle/>
+          <a:p>
+            <a:endParaRPr/>
+          </a:p>
+        </p:txBody>
       </p:sp>
       <p:sp>
         <p:nvSpPr>
@@ -3893,7 +3796,7 @@
           <a:bodyPr wrap="square" rtlCol="0" anchor="t"/>
           <a:lstStyle/>
           <a:p>
-            <a:pPr indent="0" marL="0">
+            <a:pPr marL="0" indent="0">
               <a:buNone/>
             </a:pPr>
             <a:r>
@@ -3910,7 +3813,7 @@
             <a:endParaRPr lang="en-US" sz="900" dirty="0"/>
           </a:p>
           <a:p>
-            <a:pPr indent="0" marL="0">
+            <a:pPr marL="0" indent="0">
               <a:buNone/>
             </a:pPr>
             <a:r>
@@ -3927,7 +3830,7 @@
             <a:endParaRPr lang="en-US" sz="900" dirty="0"/>
           </a:p>
           <a:p>
-            <a:pPr indent="0" marL="0">
+            <a:pPr marL="0" indent="0">
               <a:buNone/>
             </a:pPr>
             <a:r>
@@ -3944,13 +3847,13 @@
             <a:endParaRPr lang="en-US" sz="900" dirty="0"/>
           </a:p>
           <a:p>
-            <a:pPr indent="0" marL="0">
-              <a:buNone/>
-            </a:pPr>
-            <a:endParaRPr lang="en-US" sz="900" dirty="0"/>
-          </a:p>
-          <a:p>
-            <a:pPr indent="0" marL="0">
+            <a:pPr marL="0" indent="0">
+              <a:buNone/>
+            </a:pPr>
+            <a:endParaRPr lang="en-US" sz="900" dirty="0"/>
+          </a:p>
+          <a:p>
+            <a:pPr marL="0" indent="0">
               <a:buNone/>
             </a:pPr>
             <a:r>
@@ -3967,7 +3870,7 @@
             <a:endParaRPr lang="en-US" sz="900" dirty="0"/>
           </a:p>
           <a:p>
-            <a:pPr indent="0" marL="0">
+            <a:pPr marL="0" indent="0">
               <a:buNone/>
             </a:pPr>
             <a:r>
@@ -3984,13 +3887,13 @@
             <a:endParaRPr lang="en-US" sz="900" dirty="0"/>
           </a:p>
           <a:p>
-            <a:pPr indent="0" marL="0">
-              <a:buNone/>
-            </a:pPr>
-            <a:endParaRPr lang="en-US" sz="900" dirty="0"/>
-          </a:p>
-          <a:p>
-            <a:pPr indent="0" marL="0">
+            <a:pPr marL="0" indent="0">
+              <a:buNone/>
+            </a:pPr>
+            <a:endParaRPr lang="en-US" sz="900" dirty="0"/>
+          </a:p>
+          <a:p>
+            <a:pPr marL="0" indent="0">
               <a:buNone/>
             </a:pPr>
             <a:r>
@@ -4007,7 +3910,7 @@
             <a:endParaRPr lang="en-US" sz="900" dirty="0"/>
           </a:p>
           <a:p>
-            <a:pPr indent="0" marL="0">
+            <a:pPr marL="0" indent="0">
               <a:buNone/>
             </a:pPr>
             <a:r>
@@ -4046,7 +3949,7 @@
           <a:bodyPr wrap="square" rtlCol="0" anchor="ctr"/>
           <a:lstStyle/>
           <a:p>
-            <a:pPr indent="0" marL="0">
+            <a:pPr marL="0" indent="0">
               <a:buNone/>
             </a:pPr>
             <a:r>
@@ -4085,6 +3988,13 @@
             <a:prstDash val="solid"/>
           </a:ln>
         </p:spPr>
+        <p:txBody>
+          <a:bodyPr/>
+          <a:lstStyle/>
+          <a:p>
+            <a:endParaRPr/>
+          </a:p>
+        </p:txBody>
       </p:sp>
       <p:sp>
         <p:nvSpPr>
@@ -4105,6 +4015,13 @@
           </a:solidFill>
           <a:ln/>
         </p:spPr>
+        <p:txBody>
+          <a:bodyPr/>
+          <a:lstStyle/>
+          <a:p>
+            <a:endParaRPr/>
+          </a:p>
+        </p:txBody>
       </p:sp>
       <p:sp>
         <p:nvSpPr>
@@ -4127,7 +4044,7 @@
           <a:bodyPr wrap="square" rtlCol="0" anchor="t"/>
           <a:lstStyle/>
           <a:p>
-            <a:pPr indent="0" marL="0">
+            <a:pPr marL="0" indent="0">
               <a:buNone/>
             </a:pPr>
             <a:r>
@@ -4144,7 +4061,7 @@
             <a:endParaRPr lang="en-US" sz="900" dirty="0"/>
           </a:p>
           <a:p>
-            <a:pPr indent="0" marL="0">
+            <a:pPr marL="0" indent="0">
               <a:buNone/>
             </a:pPr>
             <a:r>
@@ -4161,7 +4078,7 @@
             <a:endParaRPr lang="en-US" sz="900" dirty="0"/>
           </a:p>
           <a:p>
-            <a:pPr indent="0" marL="0">
+            <a:pPr marL="0" indent="0">
               <a:buNone/>
             </a:pPr>
             <a:r>
@@ -4178,13 +4095,13 @@
             <a:endParaRPr lang="en-US" sz="900" dirty="0"/>
           </a:p>
           <a:p>
-            <a:pPr indent="0" marL="0">
-              <a:buNone/>
-            </a:pPr>
-            <a:endParaRPr lang="en-US" sz="900" dirty="0"/>
-          </a:p>
-          <a:p>
-            <a:pPr indent="0" marL="0">
+            <a:pPr marL="0" indent="0">
+              <a:buNone/>
+            </a:pPr>
+            <a:endParaRPr lang="en-US" sz="900" dirty="0"/>
+          </a:p>
+          <a:p>
+            <a:pPr marL="0" indent="0">
               <a:buNone/>
             </a:pPr>
             <a:r>
@@ -4201,7 +4118,7 @@
             <a:endParaRPr lang="en-US" sz="900" dirty="0"/>
           </a:p>
           <a:p>
-            <a:pPr indent="0" marL="0">
+            <a:pPr marL="0" indent="0">
               <a:buNone/>
             </a:pPr>
             <a:r>
@@ -4238,6 +4155,13 @@
           </a:solidFill>
           <a:ln/>
         </p:spPr>
+        <p:txBody>
+          <a:bodyPr/>
+          <a:lstStyle/>
+          <a:p>
+            <a:endParaRPr/>
+          </a:p>
+        </p:txBody>
       </p:sp>
       <p:sp>
         <p:nvSpPr>
@@ -4260,7 +4184,7 @@
           <a:bodyPr wrap="square" rtlCol="0" anchor="ctr"/>
           <a:lstStyle/>
           <a:p>
-            <a:pPr indent="0" marL="0">
+            <a:pPr marL="0" indent="0">
               <a:buNone/>
             </a:pPr>
             <a:r>
@@ -4296,7 +4220,7 @@
           <a:bodyPr wrap="square" rtlCol="0" anchor="ctr"/>
           <a:lstStyle/>
           <a:p>
-            <a:pPr indent="0" marL="0">
+            <a:pPr marL="0" indent="0">
               <a:buNone/>
             </a:pPr>
             <a:r>
@@ -4332,7 +4256,7 @@
           <a:bodyPr wrap="square" rtlCol="0" anchor="ctr"/>
           <a:lstStyle/>
           <a:p>
-            <a:pPr algn="ctr" indent="0" marL="0">
+            <a:pPr marL="0" indent="0" algn="ctr">
               <a:buNone/>
             </a:pPr>
             <a:r>
@@ -4368,7 +4292,7 @@
           <a:bodyPr wrap="square" rtlCol="0" anchor="ctr"/>
           <a:lstStyle/>
           <a:p>
-            <a:pPr algn="ctr" indent="0" marL="0">
+            <a:pPr marL="0" indent="0" algn="ctr">
               <a:buNone/>
             </a:pPr>
             <a:r>
@@ -4404,7 +4328,7 @@
           <a:bodyPr wrap="square" rtlCol="0" anchor="ctr"/>
           <a:lstStyle/>
           <a:p>
-            <a:pPr indent="0" marL="0">
+            <a:pPr marL="0" indent="0">
               <a:buNone/>
             </a:pPr>
             <a:r>
@@ -4440,7 +4364,7 @@
           <a:bodyPr wrap="square" rtlCol="0" anchor="ctr"/>
           <a:lstStyle/>
           <a:p>
-            <a:pPr algn="ctr" indent="0" marL="0">
+            <a:pPr marL="0" indent="0" algn="ctr">
               <a:buNone/>
             </a:pPr>
             <a:r>
@@ -4476,7 +4400,7 @@
           <a:bodyPr wrap="square" rtlCol="0" anchor="ctr"/>
           <a:lstStyle/>
           <a:p>
-            <a:pPr algn="ctr" indent="0" marL="0">
+            <a:pPr marL="0" indent="0" algn="ctr">
               <a:buNone/>
             </a:pPr>
             <a:r>
@@ -4512,7 +4436,7 @@
           <a:bodyPr wrap="square" rtlCol="0" anchor="ctr"/>
           <a:lstStyle/>
           <a:p>
-            <a:pPr indent="0" marL="0">
+            <a:pPr marL="0" indent="0">
               <a:buNone/>
             </a:pPr>
             <a:r>
@@ -4548,7 +4472,7 @@
           <a:bodyPr wrap="square" rtlCol="0" anchor="ctr"/>
           <a:lstStyle/>
           <a:p>
-            <a:pPr algn="ctr" indent="0" marL="0">
+            <a:pPr marL="0" indent="0" algn="ctr">
               <a:buNone/>
             </a:pPr>
             <a:r>
@@ -4584,7 +4508,7 @@
           <a:bodyPr wrap="square" rtlCol="0" anchor="ctr"/>
           <a:lstStyle/>
           <a:p>
-            <a:pPr algn="ctr" indent="0" marL="0">
+            <a:pPr marL="0" indent="0" algn="ctr">
               <a:buNone/>
             </a:pPr>
             <a:r>
@@ -4620,7 +4544,7 @@
           <a:bodyPr wrap="square" rtlCol="0" anchor="ctr"/>
           <a:lstStyle/>
           <a:p>
-            <a:pPr indent="0" marL="0">
+            <a:pPr marL="0" indent="0">
               <a:buNone/>
             </a:pPr>
             <a:r>
@@ -4656,7 +4580,7 @@
           <a:bodyPr wrap="square" rtlCol="0" anchor="ctr"/>
           <a:lstStyle/>
           <a:p>
-            <a:pPr algn="ctr" indent="0" marL="0">
+            <a:pPr marL="0" indent="0" algn="ctr">
               <a:buNone/>
             </a:pPr>
             <a:r>
@@ -4692,7 +4616,7 @@
           <a:bodyPr wrap="square" rtlCol="0" anchor="ctr"/>
           <a:lstStyle/>
           <a:p>
-            <a:pPr algn="ctr" indent="0" marL="0">
+            <a:pPr marL="0" indent="0" algn="ctr">
               <a:buNone/>
             </a:pPr>
             <a:r>
@@ -4728,7 +4652,7 @@
           <a:bodyPr wrap="square" rtlCol="0" anchor="ctr"/>
           <a:lstStyle/>
           <a:p>
-            <a:pPr algn="ctr" indent="0" marL="0">
+            <a:pPr marL="0" indent="0" algn="ctr">
               <a:buNone/>
             </a:pPr>
             <a:r>
@@ -4764,7 +4688,7 @@
           <a:bodyPr wrap="square" rtlCol="0" anchor="ctr"/>
           <a:lstStyle/>
           <a:p>
-            <a:pPr algn="ctr" indent="0" marL="0">
+            <a:pPr marL="0" indent="0" algn="ctr">
               <a:buNone/>
             </a:pPr>
             <a:r>
@@ -4798,6 +4722,13 @@
           </a:solidFill>
           <a:ln/>
         </p:spPr>
+        <p:txBody>
+          <a:bodyPr/>
+          <a:lstStyle/>
+          <a:p>
+            <a:endParaRPr/>
+          </a:p>
+        </p:txBody>
       </p:sp>
       <p:sp>
         <p:nvSpPr>
@@ -4820,7 +4751,7 @@
           <a:bodyPr wrap="square" rtlCol="0" anchor="ctr"/>
           <a:lstStyle/>
           <a:p>
-            <a:pPr indent="0" marL="0">
+            <a:pPr marL="0" indent="0">
               <a:buNone/>
             </a:pPr>
             <a:r>
@@ -4837,7 +4768,7 @@
             <a:endParaRPr lang="en-US" sz="900" dirty="0"/>
           </a:p>
           <a:p>
-            <a:pPr indent="0" marL="0">
+            <a:pPr marL="0" indent="0">
               <a:buNone/>
             </a:pPr>
             <a:r>
@@ -4854,13 +4785,13 @@
             <a:endParaRPr lang="en-US" sz="900" dirty="0"/>
           </a:p>
           <a:p>
-            <a:pPr indent="0" marL="0">
-              <a:buNone/>
-            </a:pPr>
-            <a:endParaRPr lang="en-US" sz="900" dirty="0"/>
-          </a:p>
-          <a:p>
-            <a:pPr indent="0" marL="0">
+            <a:pPr marL="0" indent="0">
+              <a:buNone/>
+            </a:pPr>
+            <a:endParaRPr lang="en-US" sz="900" dirty="0"/>
+          </a:p>
+          <a:p>
+            <a:pPr marL="0" indent="0">
               <a:buNone/>
             </a:pPr>
             <a:r>
@@ -4877,7 +4808,7 @@
             <a:endParaRPr lang="en-US" sz="900" dirty="0"/>
           </a:p>
           <a:p>
-            <a:pPr indent="0" marL="0">
+            <a:pPr marL="0" indent="0">
               <a:buNone/>
             </a:pPr>
             <a:r>
@@ -4911,6 +4842,7 @@
         <a:solidFill>
           <a:srgbClr val="0D1117"/>
         </a:solidFill>
+        <a:effectLst/>
       </p:bgPr>
     </p:bg>
     <p:spTree>
@@ -4948,7 +4880,7 @@
           <a:bodyPr wrap="square" rtlCol="0" anchor="ctr"/>
           <a:lstStyle/>
           <a:p>
-            <a:pPr indent="0" marL="0">
+            <a:pPr marL="0" indent="0">
               <a:buNone/>
             </a:pPr>
             <a:r>
@@ -4987,18 +4919,14 @@
           <a:bodyPr wrap="square" rtlCol="0" anchor="ctr"/>
           <a:lstStyle/>
           <a:p>
-            <a:pPr indent="0" marL="0">
-              <a:buNone/>
-            </a:pPr>
-            <a:r>
-              <a:rPr lang="en-US" sz="1200" b="1" dirty="0">
-                <a:solidFill>
-                  <a:srgbClr val="2A9D8F"/>
-                </a:solidFill>
-              </a:rPr>
-              <a:t>Const enables safe concurrent access:</a:t>
-            </a:r>
-            <a:endParaRPr lang="en-US" sz="1200" dirty="0"/>
+            <a:r>
+              <a:rPr dirty="0">
+                <a:solidFill>
+                  <a:schemeClr val="bg2"/>
+                </a:solidFill>
+              </a:rPr>
+              <a:t>Const can enable shared read-only access:</a:t>
+            </a:r>
           </a:p>
         </p:txBody>
       </p:sp>
@@ -5026,6 +4954,13 @@
             <a:prstDash val="solid"/>
           </a:ln>
         </p:spPr>
+        <p:txBody>
+          <a:bodyPr/>
+          <a:lstStyle/>
+          <a:p>
+            <a:endParaRPr/>
+          </a:p>
+        </p:txBody>
       </p:sp>
       <p:sp>
         <p:nvSpPr>
@@ -5046,6 +4981,13 @@
           </a:solidFill>
           <a:ln/>
         </p:spPr>
+        <p:txBody>
+          <a:bodyPr/>
+          <a:lstStyle/>
+          <a:p>
+            <a:endParaRPr/>
+          </a:p>
+        </p:txBody>
       </p:sp>
       <p:sp>
         <p:nvSpPr>
@@ -5068,7 +5010,7 @@
           <a:bodyPr wrap="square" rtlCol="0" anchor="t"/>
           <a:lstStyle/>
           <a:p>
-            <a:pPr indent="0" marL="0">
+            <a:pPr marL="0" indent="0">
               <a:buNone/>
             </a:pPr>
             <a:r>
@@ -5085,13 +5027,13 @@
             <a:endParaRPr lang="en-US" sz="900" dirty="0"/>
           </a:p>
           <a:p>
-            <a:pPr indent="0" marL="0">
-              <a:buNone/>
-            </a:pPr>
-            <a:endParaRPr lang="en-US" sz="900" dirty="0"/>
-          </a:p>
-          <a:p>
-            <a:pPr indent="0" marL="0">
+            <a:pPr marL="0" indent="0">
+              <a:buNone/>
+            </a:pPr>
+            <a:endParaRPr lang="en-US" sz="900" dirty="0"/>
+          </a:p>
+          <a:p>
+            <a:pPr marL="0" indent="0">
               <a:buNone/>
             </a:pPr>
             <a:r>
@@ -5108,7 +5050,7 @@
             <a:endParaRPr lang="en-US" sz="900" dirty="0"/>
           </a:p>
           <a:p>
-            <a:pPr indent="0" marL="0">
+            <a:pPr marL="0" indent="0">
               <a:buNone/>
             </a:pPr>
             <a:r>
@@ -5125,7 +5067,7 @@
             <a:endParaRPr lang="en-US" sz="900" dirty="0"/>
           </a:p>
           <a:p>
-            <a:pPr indent="0" marL="0">
+            <a:pPr marL="0" indent="0">
               <a:buNone/>
             </a:pPr>
             <a:r>
@@ -5142,7 +5084,7 @@
             <a:endParaRPr lang="en-US" sz="900" dirty="0"/>
           </a:p>
           <a:p>
-            <a:pPr indent="0" marL="0">
+            <a:pPr marL="0" indent="0">
               <a:buNone/>
             </a:pPr>
             <a:r>
@@ -5159,7 +5101,7 @@
             <a:endParaRPr lang="en-US" sz="900" dirty="0"/>
           </a:p>
           <a:p>
-            <a:pPr indent="0" marL="0">
+            <a:pPr marL="0" indent="0">
               <a:buNone/>
             </a:pPr>
             <a:r>
@@ -5176,7 +5118,7 @@
             <a:endParaRPr lang="en-US" sz="900" dirty="0"/>
           </a:p>
           <a:p>
-            <a:pPr indent="0" marL="0">
+            <a:pPr marL="0" indent="0">
               <a:buNone/>
             </a:pPr>
             <a:r>
@@ -5193,7 +5135,7 @@
             <a:endParaRPr lang="en-US" sz="900" dirty="0"/>
           </a:p>
           <a:p>
-            <a:pPr indent="0" marL="0">
+            <a:pPr marL="0" indent="0">
               <a:buNone/>
             </a:pPr>
             <a:r>
@@ -5230,6 +5172,13 @@
           </a:solidFill>
           <a:ln/>
         </p:spPr>
+        <p:txBody>
+          <a:bodyPr/>
+          <a:lstStyle/>
+          <a:p>
+            <a:endParaRPr/>
+          </a:p>
+        </p:txBody>
       </p:sp>
       <p:sp>
         <p:nvSpPr>
@@ -5252,18 +5201,14 @@
           <a:bodyPr wrap="square" rtlCol="0" anchor="ctr"/>
           <a:lstStyle/>
           <a:p>
-            <a:pPr indent="0" marL="0">
-              <a:buNone/>
-            </a:pPr>
-            <a:r>
-              <a:rPr lang="en-US" sz="1000" b="1" dirty="0">
-                <a:solidFill>
-                  <a:srgbClr val="58A6FF"/>
-                </a:solidFill>
-              </a:rPr>
-              <a:t>STANDARD LIBRARY GUARANTEE</a:t>
-            </a:r>
-            <a:endParaRPr lang="en-US" sz="1000" dirty="0"/>
+            <a:r>
+              <a:rPr dirty="0">
+                <a:solidFill>
+                  <a:schemeClr val="bg2"/>
+                </a:solidFill>
+              </a:rPr>
+              <a:t>STANDARD LIBRARY NOTE</a:t>
+            </a:r>
           </a:p>
         </p:txBody>
       </p:sp>
@@ -5288,100 +5233,34 @@
           <a:bodyPr wrap="square" rtlCol="0" anchor="ctr"/>
           <a:lstStyle/>
           <a:p>
-            <a:pPr indent="0" marL="0">
-              <a:buNone/>
-            </a:pPr>
-            <a:r>
-              <a:rPr lang="en-US" sz="1000" dirty="0">
-                <a:solidFill>
-                  <a:srgbClr val="E6EDF3"/>
-                </a:solidFill>
-              </a:rPr>
-              <a:t>• const methods can be called</a:t>
-            </a:r>
-            <a:endParaRPr lang="en-US" sz="1000" dirty="0"/>
-          </a:p>
-          <a:p>
-            <a:pPr indent="0" marL="0">
-              <a:buNone/>
-            </a:pPr>
-            <a:r>
-              <a:rPr lang="en-US" sz="1000" dirty="0">
-                <a:solidFill>
-                  <a:srgbClr val="E6EDF3"/>
-                </a:solidFill>
-              </a:rPr>
-              <a:t>  concurrently from multiple threads</a:t>
-            </a:r>
-            <a:endParaRPr lang="en-US" sz="1000" dirty="0"/>
-          </a:p>
-          <a:p>
-            <a:pPr indent="0" marL="0">
-              <a:buNone/>
-            </a:pPr>
-            <a:endParaRPr lang="en-US" sz="1000" dirty="0"/>
-          </a:p>
-          <a:p>
-            <a:pPr indent="0" marL="0">
-              <a:buNone/>
-            </a:pPr>
-            <a:r>
-              <a:rPr lang="en-US" sz="1000" dirty="0">
-                <a:solidFill>
-                  <a:srgbClr val="E6EDF3"/>
-                </a:solidFill>
-              </a:rPr>
-              <a:t>• non-const methods require</a:t>
-            </a:r>
-            <a:endParaRPr lang="en-US" sz="1000" dirty="0"/>
-          </a:p>
-          <a:p>
-            <a:pPr indent="0" marL="0">
-              <a:buNone/>
-            </a:pPr>
-            <a:r>
-              <a:rPr lang="en-US" sz="1000" dirty="0">
-                <a:solidFill>
-                  <a:srgbClr val="E6EDF3"/>
-                </a:solidFill>
-              </a:rPr>
-              <a:t>  exclusive access</a:t>
-            </a:r>
-            <a:endParaRPr lang="en-US" sz="1000" dirty="0"/>
-          </a:p>
-          <a:p>
-            <a:pPr indent="0" marL="0">
-              <a:buNone/>
-            </a:pPr>
-            <a:endParaRPr lang="en-US" sz="1000" dirty="0"/>
-          </a:p>
-          <a:p>
-            <a:pPr indent="0" marL="0">
-              <a:buNone/>
-            </a:pPr>
-            <a:r>
-              <a:rPr lang="en-US" sz="1000" dirty="0">
-                <a:solidFill>
-                  <a:srgbClr val="E6EDF3"/>
-                </a:solidFill>
-              </a:rPr>
-              <a:t>Const objects are safe to share</a:t>
-            </a:r>
-            <a:endParaRPr lang="en-US" sz="1000" dirty="0"/>
-          </a:p>
-          <a:p>
-            <a:pPr indent="0" marL="0">
-              <a:buNone/>
-            </a:pPr>
-            <a:r>
-              <a:rPr lang="en-US" sz="1000" dirty="0">
-                <a:solidFill>
-                  <a:srgbClr val="E6EDF3"/>
-                </a:solidFill>
-              </a:rPr>
-              <a:t>without locks.</a:t>
-            </a:r>
-            <a:endParaRPr lang="en-US" sz="1000" dirty="0"/>
+            <a:r>
+              <a:rPr sz="1100" dirty="0">
+                <a:solidFill>
+                  <a:schemeClr val="bg2"/>
+                </a:solidFill>
+              </a:rPr>
+              <a:t>• Concurrent reads are OK when no thread mutates the object</a:t>
+            </a:r>
+          </a:p>
+          <a:p>
+            <a:r>
+              <a:rPr sz="1100" dirty="0">
+                <a:solidFill>
+                  <a:schemeClr val="bg2"/>
+                </a:solidFill>
+              </a:rPr>
+              <a:t>• Any concurrent mutation without synchronization is a data race</a:t>
+            </a:r>
+          </a:p>
+          <a:p>
+            <a:r>
+              <a:rPr sz="1100" dirty="0">
+                <a:solidFill>
+                  <a:schemeClr val="bg2"/>
+                </a:solidFill>
+              </a:rPr>
+              <a:t>• `const` expresses read-only intent, but internal mutation (`mutable`, caches, atomics) can still exist</a:t>
+            </a:r>
           </a:p>
         </p:txBody>
       </p:sp>
@@ -5394,7 +5273,7 @@
         <p:spPr>
           <a:xfrm>
             <a:off x="365760" y="3063240"/>
-            <a:ext cx="8412480" cy="822960"/>
+            <a:ext cx="8412480" cy="1165860"/>
           </a:xfrm>
           <a:prstGeom prst="rect">
             <a:avLst/>
@@ -5404,6 +5283,13 @@
           </a:solidFill>
           <a:ln/>
         </p:spPr>
+        <p:txBody>
+          <a:bodyPr/>
+          <a:lstStyle/>
+          <a:p>
+            <a:endParaRPr/>
+          </a:p>
+        </p:txBody>
       </p:sp>
       <p:sp>
         <p:nvSpPr>
@@ -5426,7 +5312,7 @@
           <a:bodyPr wrap="square" rtlCol="0" anchor="ctr"/>
           <a:lstStyle/>
           <a:p>
-            <a:pPr indent="0" marL="0">
+            <a:pPr marL="0" indent="0">
               <a:buNone/>
             </a:pPr>
             <a:r>
@@ -5449,8 +5335,8 @@
         </p:nvSpPr>
         <p:spPr>
           <a:xfrm>
-            <a:off x="502920" y="3337560"/>
-            <a:ext cx="8138160" cy="502920"/>
+            <a:off x="502920" y="3337559"/>
+            <a:ext cx="8138160" cy="733213"/>
           </a:xfrm>
           <a:prstGeom prst="rect">
             <a:avLst/>
@@ -5465,6 +5351,13 @@
             <a:prstDash val="solid"/>
           </a:ln>
         </p:spPr>
+        <p:txBody>
+          <a:bodyPr/>
+          <a:lstStyle/>
+          <a:p>
+            <a:endParaRPr/>
+          </a:p>
+        </p:txBody>
       </p:sp>
       <p:sp>
         <p:nvSpPr>
@@ -5474,8 +5367,8 @@
         </p:nvSpPr>
         <p:spPr>
           <a:xfrm>
-            <a:off x="502920" y="3337560"/>
-            <a:ext cx="36576" cy="502920"/>
+            <a:off x="502919" y="3337560"/>
+            <a:ext cx="45719" cy="733212"/>
           </a:xfrm>
           <a:prstGeom prst="rect">
             <a:avLst/>
@@ -5485,6 +5378,13 @@
           </a:solidFill>
           <a:ln/>
         </p:spPr>
+        <p:txBody>
+          <a:bodyPr/>
+          <a:lstStyle/>
+          <a:p>
+            <a:endParaRPr/>
+          </a:p>
+        </p:txBody>
       </p:sp>
       <p:sp>
         <p:nvSpPr>
@@ -5494,8 +5394,8 @@
         </p:nvSpPr>
         <p:spPr>
           <a:xfrm>
-            <a:off x="640080" y="3429000"/>
-            <a:ext cx="7909560" cy="320040"/>
+            <a:off x="640080" y="3408681"/>
+            <a:ext cx="7909560" cy="594360"/>
           </a:xfrm>
           <a:prstGeom prst="rect">
             <a:avLst/>
@@ -5507,7 +5407,7 @@
           <a:bodyPr wrap="square" rtlCol="0" anchor="t"/>
           <a:lstStyle/>
           <a:p>
-            <a:pPr indent="0" marL="0">
+            <a:pPr marL="0" indent="0">
               <a:buNone/>
             </a:pPr>
             <a:r>
@@ -5524,7 +5424,7 @@
             <a:endParaRPr lang="en-US" sz="900" dirty="0"/>
           </a:p>
           <a:p>
-            <a:pPr indent="0" marL="0">
+            <a:pPr marL="0" indent="0">
               <a:buNone/>
             </a:pPr>
             <a:r>
@@ -5541,7 +5441,7 @@
             <a:endParaRPr lang="en-US" sz="900" dirty="0"/>
           </a:p>
           <a:p>
-            <a:pPr indent="0" marL="0">
+            <a:pPr marL="0" indent="0">
               <a:buNone/>
             </a:pPr>
             <a:r>
@@ -5558,7 +5458,7 @@
             <a:endParaRPr lang="en-US" sz="900" dirty="0"/>
           </a:p>
           <a:p>
-            <a:pPr indent="0" marL="0">
+            <a:pPr marL="0" indent="0">
               <a:buNone/>
             </a:pPr>
             <a:r>
@@ -5592,6 +5492,7 @@
         <a:solidFill>
           <a:srgbClr val="0D1117"/>
         </a:solidFill>
+        <a:effectLst/>
       </p:bgPr>
     </p:bg>
     <p:spTree>
@@ -5629,7 +5530,7 @@
           <a:bodyPr wrap="square" rtlCol="0" anchor="ctr"/>
           <a:lstStyle/>
           <a:p>
-            <a:pPr indent="0" marL="0">
+            <a:pPr marL="0" indent="0">
               <a:buNone/>
             </a:pPr>
             <a:r>
@@ -5666,6 +5567,13 @@
           </a:solidFill>
           <a:ln/>
         </p:spPr>
+        <p:txBody>
+          <a:bodyPr/>
+          <a:lstStyle/>
+          <a:p>
+            <a:endParaRPr/>
+          </a:p>
+        </p:txBody>
       </p:sp>
       <p:sp>
         <p:nvSpPr>
@@ -5686,6 +5594,13 @@
           </a:solidFill>
           <a:ln/>
         </p:spPr>
+        <p:txBody>
+          <a:bodyPr/>
+          <a:lstStyle/>
+          <a:p>
+            <a:endParaRPr/>
+          </a:p>
+        </p:txBody>
       </p:sp>
       <p:sp>
         <p:nvSpPr>
@@ -5708,7 +5623,7 @@
           <a:bodyPr wrap="square" rtlCol="0" anchor="ctr"/>
           <a:lstStyle/>
           <a:p>
-            <a:pPr indent="0" marL="0">
+            <a:pPr marL="0" indent="0">
               <a:buNone/>
             </a:pPr>
             <a:r>
@@ -5744,7 +5659,7 @@
           <a:bodyPr wrap="square" rtlCol="0" anchor="ctr"/>
           <a:lstStyle/>
           <a:p>
-            <a:pPr indent="0" marL="0">
+            <a:pPr marL="0" indent="0">
               <a:buNone/>
             </a:pPr>
             <a:r>
@@ -5778,6 +5693,13 @@
           </a:solidFill>
           <a:ln/>
         </p:spPr>
+        <p:txBody>
+          <a:bodyPr/>
+          <a:lstStyle/>
+          <a:p>
+            <a:endParaRPr/>
+          </a:p>
+        </p:txBody>
       </p:sp>
       <p:sp>
         <p:nvSpPr>
@@ -5798,6 +5720,13 @@
           </a:solidFill>
           <a:ln/>
         </p:spPr>
+        <p:txBody>
+          <a:bodyPr/>
+          <a:lstStyle/>
+          <a:p>
+            <a:endParaRPr/>
+          </a:p>
+        </p:txBody>
       </p:sp>
       <p:sp>
         <p:nvSpPr>
@@ -5820,7 +5749,7 @@
           <a:bodyPr wrap="square" rtlCol="0" anchor="ctr"/>
           <a:lstStyle/>
           <a:p>
-            <a:pPr indent="0" marL="0">
+            <a:pPr marL="0" indent="0">
               <a:buNone/>
             </a:pPr>
             <a:r>
@@ -5856,7 +5785,7 @@
           <a:bodyPr wrap="square" rtlCol="0" anchor="ctr"/>
           <a:lstStyle/>
           <a:p>
-            <a:pPr indent="0" marL="0">
+            <a:pPr marL="0" indent="0">
               <a:buNone/>
             </a:pPr>
             <a:r>
@@ -5890,6 +5819,13 @@
           </a:solidFill>
           <a:ln/>
         </p:spPr>
+        <p:txBody>
+          <a:bodyPr/>
+          <a:lstStyle/>
+          <a:p>
+            <a:endParaRPr/>
+          </a:p>
+        </p:txBody>
       </p:sp>
       <p:sp>
         <p:nvSpPr>
@@ -5910,6 +5846,13 @@
           </a:solidFill>
           <a:ln/>
         </p:spPr>
+        <p:txBody>
+          <a:bodyPr/>
+          <a:lstStyle/>
+          <a:p>
+            <a:endParaRPr/>
+          </a:p>
+        </p:txBody>
       </p:sp>
       <p:sp>
         <p:nvSpPr>
@@ -5932,7 +5875,7 @@
           <a:bodyPr wrap="square" rtlCol="0" anchor="ctr"/>
           <a:lstStyle/>
           <a:p>
-            <a:pPr indent="0" marL="0">
+            <a:pPr marL="0" indent="0">
               <a:buNone/>
             </a:pPr>
             <a:r>
@@ -5968,7 +5911,7 @@
           <a:bodyPr wrap="square" rtlCol="0" anchor="ctr"/>
           <a:lstStyle/>
           <a:p>
-            <a:pPr indent="0" marL="0">
+            <a:pPr marL="0" indent="0">
               <a:buNone/>
             </a:pPr>
             <a:r>
@@ -6002,6 +5945,13 @@
           </a:solidFill>
           <a:ln/>
         </p:spPr>
+        <p:txBody>
+          <a:bodyPr/>
+          <a:lstStyle/>
+          <a:p>
+            <a:endParaRPr/>
+          </a:p>
+        </p:txBody>
       </p:sp>
       <p:sp>
         <p:nvSpPr>
@@ -6022,6 +5972,13 @@
           </a:solidFill>
           <a:ln/>
         </p:spPr>
+        <p:txBody>
+          <a:bodyPr/>
+          <a:lstStyle/>
+          <a:p>
+            <a:endParaRPr/>
+          </a:p>
+        </p:txBody>
       </p:sp>
       <p:sp>
         <p:nvSpPr>
@@ -6044,7 +6001,7 @@
           <a:bodyPr wrap="square" rtlCol="0" anchor="ctr"/>
           <a:lstStyle/>
           <a:p>
-            <a:pPr indent="0" marL="0">
+            <a:pPr marL="0" indent="0">
               <a:buNone/>
             </a:pPr>
             <a:r>
@@ -6080,7 +6037,7 @@
           <a:bodyPr wrap="square" rtlCol="0" anchor="ctr"/>
           <a:lstStyle/>
           <a:p>
-            <a:pPr indent="0" marL="0">
+            <a:pPr marL="0" indent="0">
               <a:buNone/>
             </a:pPr>
             <a:r>
@@ -6114,6 +6071,13 @@
           </a:solidFill>
           <a:ln/>
         </p:spPr>
+        <p:txBody>
+          <a:bodyPr/>
+          <a:lstStyle/>
+          <a:p>
+            <a:endParaRPr/>
+          </a:p>
+        </p:txBody>
       </p:sp>
       <p:sp>
         <p:nvSpPr>
@@ -6134,6 +6098,13 @@
           </a:solidFill>
           <a:ln/>
         </p:spPr>
+        <p:txBody>
+          <a:bodyPr/>
+          <a:lstStyle/>
+          <a:p>
+            <a:endParaRPr/>
+          </a:p>
+        </p:txBody>
       </p:sp>
       <p:sp>
         <p:nvSpPr>
@@ -6156,7 +6127,7 @@
           <a:bodyPr wrap="square" rtlCol="0" anchor="ctr"/>
           <a:lstStyle/>
           <a:p>
-            <a:pPr indent="0" marL="0">
+            <a:pPr marL="0" indent="0">
               <a:buNone/>
             </a:pPr>
             <a:r>
@@ -6192,18 +6163,14 @@
           <a:bodyPr wrap="square" rtlCol="0" anchor="ctr"/>
           <a:lstStyle/>
           <a:p>
-            <a:pPr indent="0" marL="0">
-              <a:buNone/>
-            </a:pPr>
-            <a:r>
-              <a:rPr lang="en-US" sz="1000" dirty="0">
-                <a:solidFill>
-                  <a:srgbClr val="E6EDF3"/>
-                </a:solidFill>
-              </a:rPr>
-              <a:t>Const enables thread-safe sharing without locks</a:t>
-            </a:r>
-            <a:endParaRPr lang="en-US" sz="1000" dirty="0"/>
+            <a:r>
+              <a:rPr sz="1200" dirty="0">
+                <a:solidFill>
+                  <a:schemeClr val="bg2"/>
+                </a:solidFill>
+              </a:rPr>
+              <a:t>Const can enable shared read-only access; it does not replace thread-safety</a:t>
+            </a:r>
           </a:p>
         </p:txBody>
       </p:sp>
@@ -6226,6 +6193,13 @@
           </a:solidFill>
           <a:ln/>
         </p:spPr>
+        <p:txBody>
+          <a:bodyPr/>
+          <a:lstStyle/>
+          <a:p>
+            <a:endParaRPr/>
+          </a:p>
+        </p:txBody>
       </p:sp>
       <p:sp>
         <p:nvSpPr>
@@ -6246,6 +6220,13 @@
           </a:solidFill>
           <a:ln/>
         </p:spPr>
+        <p:txBody>
+          <a:bodyPr/>
+          <a:lstStyle/>
+          <a:p>
+            <a:endParaRPr/>
+          </a:p>
+        </p:txBody>
       </p:sp>
       <p:sp>
         <p:nvSpPr>
@@ -6268,7 +6249,7 @@
           <a:bodyPr wrap="square" rtlCol="0" anchor="ctr"/>
           <a:lstStyle/>
           <a:p>
-            <a:pPr indent="0" marL="0">
+            <a:pPr marL="0" indent="0">
               <a:buNone/>
             </a:pPr>
             <a:r>
@@ -6304,7 +6285,7 @@
           <a:bodyPr wrap="square" rtlCol="0" anchor="ctr"/>
           <a:lstStyle/>
           <a:p>
-            <a:pPr indent="0" marL="0">
+            <a:pPr marL="0" indent="0">
               <a:buNone/>
             </a:pPr>
             <a:r>
@@ -6340,7 +6321,7 @@
           <a:bodyPr wrap="square" rtlCol="0" anchor="ctr"/>
           <a:lstStyle/>
           <a:p>
-            <a:pPr algn="ctr" indent="0" marL="0">
+            <a:pPr marL="0" indent="0" algn="ctr">
               <a:buNone/>
             </a:pPr>
             <a:r>
@@ -6656,4 +6637,319 @@
     </a:ext>
   </a:extLst>
 </a:theme>
+</file>
+
+<file path=ppt/theme/theme2.xml><?xml version="1.0" encoding="utf-8"?>
+<a:theme xmlns:a="http://schemas.openxmlformats.org/drawingml/2006/main" name="Office Theme">
+  <a:themeElements>
+    <a:clrScheme name="Office">
+      <a:dk1>
+        <a:sysClr val="windowText" lastClr="000000"/>
+      </a:dk1>
+      <a:lt1>
+        <a:sysClr val="window" lastClr="FFFFFF"/>
+      </a:lt1>
+      <a:dk2>
+        <a:srgbClr val="0E2841"/>
+      </a:dk2>
+      <a:lt2>
+        <a:srgbClr val="E8E8E8"/>
+      </a:lt2>
+      <a:accent1>
+        <a:srgbClr val="156082"/>
+      </a:accent1>
+      <a:accent2>
+        <a:srgbClr val="E97132"/>
+      </a:accent2>
+      <a:accent3>
+        <a:srgbClr val="196B24"/>
+      </a:accent3>
+      <a:accent4>
+        <a:srgbClr val="0F9ED5"/>
+      </a:accent4>
+      <a:accent5>
+        <a:srgbClr val="A02B93"/>
+      </a:accent5>
+      <a:accent6>
+        <a:srgbClr val="4EA72E"/>
+      </a:accent6>
+      <a:hlink>
+        <a:srgbClr val="467886"/>
+      </a:hlink>
+      <a:folHlink>
+        <a:srgbClr val="96607D"/>
+      </a:folHlink>
+    </a:clrScheme>
+    <a:fontScheme name="Office">
+      <a:majorFont>
+        <a:latin typeface="Aptos Display" panose="02110004020202020204"/>
+        <a:ea typeface=""/>
+        <a:cs typeface=""/>
+        <a:font script="Jpan" typeface="游ゴシック Light"/>
+        <a:font script="Hang" typeface="맑은 고딕"/>
+        <a:font script="Hans" typeface="等线 Light"/>
+        <a:font script="Hant" typeface="新細明體"/>
+        <a:font script="Arab" typeface="Times New Roman"/>
+        <a:font script="Hebr" typeface="Times New Roman"/>
+        <a:font script="Thai" typeface="Angsana New"/>
+        <a:font script="Ethi" typeface="Nyala"/>
+        <a:font script="Beng" typeface="Vrinda"/>
+        <a:font script="Gujr" typeface="Shruti"/>
+        <a:font script="Khmr" typeface="MoolBoran"/>
+        <a:font script="Knda" typeface="Tunga"/>
+        <a:font script="Guru" typeface="Raavi"/>
+        <a:font script="Cans" typeface="Euphemia"/>
+        <a:font script="Cher" typeface="Plantagenet Cherokee"/>
+        <a:font script="Yiii" typeface="Microsoft Yi Baiti"/>
+        <a:font script="Tibt" typeface="Microsoft Himalaya"/>
+        <a:font script="Thaa" typeface="MV Boli"/>
+        <a:font script="Deva" typeface="Mangal"/>
+        <a:font script="Telu" typeface="Gautami"/>
+        <a:font script="Taml" typeface="Latha"/>
+        <a:font script="Syrc" typeface="Estrangelo Edessa"/>
+        <a:font script="Orya" typeface="Kalinga"/>
+        <a:font script="Mlym" typeface="Kartika"/>
+        <a:font script="Laoo" typeface="DokChampa"/>
+        <a:font script="Sinh" typeface="Iskoola Pota"/>
+        <a:font script="Mong" typeface="Mongolian Baiti"/>
+        <a:font script="Viet" typeface="Times New Roman"/>
+        <a:font script="Uigh" typeface="Microsoft Uighur"/>
+        <a:font script="Geor" typeface="Sylfaen"/>
+        <a:font script="Armn" typeface="Arial"/>
+        <a:font script="Bugi" typeface="Leelawadee UI"/>
+        <a:font script="Bopo" typeface="Microsoft JhengHei"/>
+        <a:font script="Java" typeface="Javanese Text"/>
+        <a:font script="Lisu" typeface="Segoe UI"/>
+        <a:font script="Mymr" typeface="Myanmar Text"/>
+        <a:font script="Nkoo" typeface="Ebrima"/>
+        <a:font script="Olck" typeface="Nirmala UI"/>
+        <a:font script="Osma" typeface="Ebrima"/>
+        <a:font script="Phag" typeface="Phagspa"/>
+        <a:font script="Syrn" typeface="Estrangelo Edessa"/>
+        <a:font script="Syrj" typeface="Estrangelo Edessa"/>
+        <a:font script="Syre" typeface="Estrangelo Edessa"/>
+        <a:font script="Sora" typeface="Nirmala UI"/>
+        <a:font script="Tale" typeface="Microsoft Tai Le"/>
+        <a:font script="Talu" typeface="Microsoft New Tai Lue"/>
+        <a:font script="Tfng" typeface="Ebrima"/>
+      </a:majorFont>
+      <a:minorFont>
+        <a:latin typeface="Aptos" panose="02110004020202020204"/>
+        <a:ea typeface=""/>
+        <a:cs typeface=""/>
+        <a:font script="Jpan" typeface="游ゴシック"/>
+        <a:font script="Hang" typeface="맑은 고딕"/>
+        <a:font script="Hans" typeface="等线"/>
+        <a:font script="Hant" typeface="新細明體"/>
+        <a:font script="Arab" typeface="Arial"/>
+        <a:font script="Hebr" typeface="Arial"/>
+        <a:font script="Thai" typeface="Cordia New"/>
+        <a:font script="Ethi" typeface="Nyala"/>
+        <a:font script="Beng" typeface="Vrinda"/>
+        <a:font script="Gujr" typeface="Shruti"/>
+        <a:font script="Khmr" typeface="DaunPenh"/>
+        <a:font script="Knda" typeface="Tunga"/>
+        <a:font script="Guru" typeface="Raavi"/>
+        <a:font script="Cans" typeface="Euphemia"/>
+        <a:font script="Cher" typeface="Plantagenet Cherokee"/>
+        <a:font script="Yiii" typeface="Microsoft Yi Baiti"/>
+        <a:font script="Tibt" typeface="Microsoft Himalaya"/>
+        <a:font script="Thaa" typeface="MV Boli"/>
+        <a:font script="Deva" typeface="Mangal"/>
+        <a:font script="Telu" typeface="Gautami"/>
+        <a:font script="Taml" typeface="Latha"/>
+        <a:font script="Syrc" typeface="Estrangelo Edessa"/>
+        <a:font script="Orya" typeface="Kalinga"/>
+        <a:font script="Mlym" typeface="Kartika"/>
+        <a:font script="Laoo" typeface="DokChampa"/>
+        <a:font script="Sinh" typeface="Iskoola Pota"/>
+        <a:font script="Mong" typeface="Mongolian Baiti"/>
+        <a:font script="Viet" typeface="Arial"/>
+        <a:font script="Uigh" typeface="Microsoft Uighur"/>
+        <a:font script="Geor" typeface="Sylfaen"/>
+        <a:font script="Armn" typeface="Arial"/>
+        <a:font script="Bugi" typeface="Leelawadee UI"/>
+        <a:font script="Bopo" typeface="Microsoft JhengHei"/>
+        <a:font script="Java" typeface="Javanese Text"/>
+        <a:font script="Lisu" typeface="Segoe UI"/>
+        <a:font script="Mymr" typeface="Myanmar Text"/>
+        <a:font script="Nkoo" typeface="Ebrima"/>
+        <a:font script="Olck" typeface="Nirmala UI"/>
+        <a:font script="Osma" typeface="Ebrima"/>
+        <a:font script="Phag" typeface="Phagspa"/>
+        <a:font script="Syrn" typeface="Estrangelo Edessa"/>
+        <a:font script="Syrj" typeface="Estrangelo Edessa"/>
+        <a:font script="Syre" typeface="Estrangelo Edessa"/>
+        <a:font script="Sora" typeface="Nirmala UI"/>
+        <a:font script="Tale" typeface="Microsoft Tai Le"/>
+        <a:font script="Talu" typeface="Microsoft New Tai Lue"/>
+        <a:font script="Tfng" typeface="Ebrima"/>
+      </a:minorFont>
+    </a:fontScheme>
+    <a:fmtScheme name="Office">
+      <a:fillStyleLst>
+        <a:solidFill>
+          <a:schemeClr val="phClr"/>
+        </a:solidFill>
+        <a:gradFill rotWithShape="1">
+          <a:gsLst>
+            <a:gs pos="0">
+              <a:schemeClr val="phClr">
+                <a:lumMod val="110000"/>
+                <a:satMod val="105000"/>
+                <a:tint val="67000"/>
+              </a:schemeClr>
+            </a:gs>
+            <a:gs pos="50000">
+              <a:schemeClr val="phClr">
+                <a:lumMod val="105000"/>
+                <a:satMod val="103000"/>
+                <a:tint val="73000"/>
+              </a:schemeClr>
+            </a:gs>
+            <a:gs pos="100000">
+              <a:schemeClr val="phClr">
+                <a:lumMod val="105000"/>
+                <a:satMod val="109000"/>
+                <a:tint val="81000"/>
+              </a:schemeClr>
+            </a:gs>
+          </a:gsLst>
+          <a:lin ang="5400000" scaled="0"/>
+        </a:gradFill>
+        <a:gradFill rotWithShape="1">
+          <a:gsLst>
+            <a:gs pos="0">
+              <a:schemeClr val="phClr">
+                <a:satMod val="103000"/>
+                <a:lumMod val="102000"/>
+                <a:tint val="94000"/>
+              </a:schemeClr>
+            </a:gs>
+            <a:gs pos="50000">
+              <a:schemeClr val="phClr">
+                <a:satMod val="110000"/>
+                <a:lumMod val="100000"/>
+                <a:shade val="100000"/>
+              </a:schemeClr>
+            </a:gs>
+            <a:gs pos="100000">
+              <a:schemeClr val="phClr">
+                <a:lumMod val="99000"/>
+                <a:satMod val="120000"/>
+                <a:shade val="78000"/>
+              </a:schemeClr>
+            </a:gs>
+          </a:gsLst>
+          <a:lin ang="5400000" scaled="0"/>
+        </a:gradFill>
+      </a:fillStyleLst>
+      <a:lnStyleLst>
+        <a:ln w="12700" cap="flat" cmpd="sng" algn="ctr">
+          <a:solidFill>
+            <a:schemeClr val="phClr"/>
+          </a:solidFill>
+          <a:prstDash val="solid"/>
+          <a:miter lim="800000"/>
+        </a:ln>
+        <a:ln w="19050" cap="flat" cmpd="sng" algn="ctr">
+          <a:solidFill>
+            <a:schemeClr val="phClr"/>
+          </a:solidFill>
+          <a:prstDash val="solid"/>
+          <a:miter lim="800000"/>
+        </a:ln>
+        <a:ln w="25400" cap="flat" cmpd="sng" algn="ctr">
+          <a:solidFill>
+            <a:schemeClr val="phClr"/>
+          </a:solidFill>
+          <a:prstDash val="solid"/>
+          <a:miter lim="800000"/>
+        </a:ln>
+      </a:lnStyleLst>
+      <a:effectStyleLst>
+        <a:effectStyle>
+          <a:effectLst/>
+        </a:effectStyle>
+        <a:effectStyle>
+          <a:effectLst/>
+        </a:effectStyle>
+        <a:effectStyle>
+          <a:effectLst>
+            <a:outerShdw blurRad="57150" dist="19050" dir="5400000" algn="ctr" rotWithShape="0">
+              <a:srgbClr val="000000">
+                <a:alpha val="63000"/>
+              </a:srgbClr>
+            </a:outerShdw>
+          </a:effectLst>
+        </a:effectStyle>
+      </a:effectStyleLst>
+      <a:bgFillStyleLst>
+        <a:solidFill>
+          <a:schemeClr val="phClr"/>
+        </a:solidFill>
+        <a:solidFill>
+          <a:schemeClr val="phClr">
+            <a:tint val="95000"/>
+            <a:satMod val="170000"/>
+          </a:schemeClr>
+        </a:solidFill>
+        <a:gradFill rotWithShape="1">
+          <a:gsLst>
+            <a:gs pos="0">
+              <a:schemeClr val="phClr">
+                <a:tint val="93000"/>
+                <a:satMod val="150000"/>
+                <a:shade val="98000"/>
+                <a:lumMod val="102000"/>
+              </a:schemeClr>
+            </a:gs>
+            <a:gs pos="50000">
+              <a:schemeClr val="phClr">
+                <a:tint val="98000"/>
+                <a:satMod val="130000"/>
+                <a:shade val="90000"/>
+                <a:lumMod val="103000"/>
+              </a:schemeClr>
+            </a:gs>
+            <a:gs pos="100000">
+              <a:schemeClr val="phClr">
+                <a:shade val="63000"/>
+                <a:satMod val="120000"/>
+              </a:schemeClr>
+            </a:gs>
+          </a:gsLst>
+          <a:lin ang="5400000" scaled="0"/>
+        </a:gradFill>
+      </a:bgFillStyleLst>
+    </a:fmtScheme>
+  </a:themeElements>
+  <a:objectDefaults>
+    <a:lnDef>
+      <a:spPr/>
+      <a:bodyPr/>
+      <a:lstStyle/>
+      <a:style>
+        <a:lnRef idx="2">
+          <a:schemeClr val="accent1"/>
+        </a:lnRef>
+        <a:fillRef idx="0">
+          <a:schemeClr val="accent1"/>
+        </a:fillRef>
+        <a:effectRef idx="1">
+          <a:schemeClr val="accent1"/>
+        </a:effectRef>
+        <a:fontRef idx="minor">
+          <a:schemeClr val="tx1"/>
+        </a:fontRef>
+      </a:style>
+    </a:lnDef>
+  </a:objectDefaults>
+  <a:extraClrSchemeLst/>
+  <a:extLst>
+    <a:ext uri="{05A4C25C-085E-4340-85A3-A5531E510DB2}">
+      <thm15:themeFamily xmlns:thm15="http://schemas.microsoft.com/office/thememl/2012/main" name="Office Theme" id="{2E142A2C-CD16-42D6-873A-C26D2A0506FA}" vid="{1BDDFF52-6CD6-40A5-AB3C-68EB2F1E4D0A}"/>
+    </a:ext>
+  </a:extLst>
+</a:theme>
 </file>